--- a/architecture.pptx
+++ b/architecture.pptx
@@ -4,19 +4,16 @@
   <p:sldMasterIdLst>
     <p:sldMasterId id="2147483648" r:id="rId1"/>
   </p:sldMasterIdLst>
-  <p:notesMasterIdLst>
-    <p:notesMasterId r:id="rId3"/>
-  </p:notesMasterIdLst>
   <p:sldIdLst>
     <p:sldId id="256" r:id="rId2"/>
   </p:sldIdLst>
-  <p:sldSz cx="9144000" cy="6858000" type="screen4x3"/>
+  <p:sldSz cx="12192000" cy="6858000"/>
   <p:notesSz cx="6858000" cy="9144000"/>
   <p:defaultTextStyle>
     <a:defPPr>
       <a:defRPr lang="en-US"/>
     </a:defPPr>
-    <a:lvl1pPr marL="0" algn="l" defTabSz="457200" rtl="0" eaLnBrk="1" latinLnBrk="0" hangingPunct="1">
+    <a:lvl1pPr marL="0" algn="l" defTabSz="914400" rtl="0" eaLnBrk="1" latinLnBrk="0" hangingPunct="1">
       <a:defRPr sz="1800" kern="1200">
         <a:solidFill>
           <a:schemeClr val="tx1"/>
@@ -26,7 +23,7 @@
         <a:cs typeface="+mn-cs"/>
       </a:defRPr>
     </a:lvl1pPr>
-    <a:lvl2pPr marL="457200" algn="l" defTabSz="457200" rtl="0" eaLnBrk="1" latinLnBrk="0" hangingPunct="1">
+    <a:lvl2pPr marL="457200" algn="l" defTabSz="914400" rtl="0" eaLnBrk="1" latinLnBrk="0" hangingPunct="1">
       <a:defRPr sz="1800" kern="1200">
         <a:solidFill>
           <a:schemeClr val="tx1"/>
@@ -36,7 +33,7 @@
         <a:cs typeface="+mn-cs"/>
       </a:defRPr>
     </a:lvl2pPr>
-    <a:lvl3pPr marL="914400" algn="l" defTabSz="457200" rtl="0" eaLnBrk="1" latinLnBrk="0" hangingPunct="1">
+    <a:lvl3pPr marL="914400" algn="l" defTabSz="914400" rtl="0" eaLnBrk="1" latinLnBrk="0" hangingPunct="1">
       <a:defRPr sz="1800" kern="1200">
         <a:solidFill>
           <a:schemeClr val="tx1"/>
@@ -46,7 +43,7 @@
         <a:cs typeface="+mn-cs"/>
       </a:defRPr>
     </a:lvl3pPr>
-    <a:lvl4pPr marL="1371600" algn="l" defTabSz="457200" rtl="0" eaLnBrk="1" latinLnBrk="0" hangingPunct="1">
+    <a:lvl4pPr marL="1371600" algn="l" defTabSz="914400" rtl="0" eaLnBrk="1" latinLnBrk="0" hangingPunct="1">
       <a:defRPr sz="1800" kern="1200">
         <a:solidFill>
           <a:schemeClr val="tx1"/>
@@ -56,7 +53,7 @@
         <a:cs typeface="+mn-cs"/>
       </a:defRPr>
     </a:lvl4pPr>
-    <a:lvl5pPr marL="1828800" algn="l" defTabSz="457200" rtl="0" eaLnBrk="1" latinLnBrk="0" hangingPunct="1">
+    <a:lvl5pPr marL="1828800" algn="l" defTabSz="914400" rtl="0" eaLnBrk="1" latinLnBrk="0" hangingPunct="1">
       <a:defRPr sz="1800" kern="1200">
         <a:solidFill>
           <a:schemeClr val="tx1"/>
@@ -66,7 +63,7 @@
         <a:cs typeface="+mn-cs"/>
       </a:defRPr>
     </a:lvl5pPr>
-    <a:lvl6pPr marL="2286000" algn="l" defTabSz="457200" rtl="0" eaLnBrk="1" latinLnBrk="0" hangingPunct="1">
+    <a:lvl6pPr marL="2286000" algn="l" defTabSz="914400" rtl="0" eaLnBrk="1" latinLnBrk="0" hangingPunct="1">
       <a:defRPr sz="1800" kern="1200">
         <a:solidFill>
           <a:schemeClr val="tx1"/>
@@ -76,7 +73,7 @@
         <a:cs typeface="+mn-cs"/>
       </a:defRPr>
     </a:lvl6pPr>
-    <a:lvl7pPr marL="2743200" algn="l" defTabSz="457200" rtl="0" eaLnBrk="1" latinLnBrk="0" hangingPunct="1">
+    <a:lvl7pPr marL="2743200" algn="l" defTabSz="914400" rtl="0" eaLnBrk="1" latinLnBrk="0" hangingPunct="1">
       <a:defRPr sz="1800" kern="1200">
         <a:solidFill>
           <a:schemeClr val="tx1"/>
@@ -86,7 +83,7 @@
         <a:cs typeface="+mn-cs"/>
       </a:defRPr>
     </a:lvl7pPr>
-    <a:lvl8pPr marL="3200400" algn="l" defTabSz="457200" rtl="0" eaLnBrk="1" latinLnBrk="0" hangingPunct="1">
+    <a:lvl8pPr marL="3200400" algn="l" defTabSz="914400" rtl="0" eaLnBrk="1" latinLnBrk="0" hangingPunct="1">
       <a:defRPr sz="1800" kern="1200">
         <a:solidFill>
           <a:schemeClr val="tx1"/>
@@ -96,7 +93,7 @@
         <a:cs typeface="+mn-cs"/>
       </a:defRPr>
     </a:lvl8pPr>
-    <a:lvl9pPr marL="3657600" algn="l" defTabSz="457200" rtl="0" eaLnBrk="1" latinLnBrk="0" hangingPunct="1">
+    <a:lvl9pPr marL="3657600" algn="l" defTabSz="914400" rtl="0" eaLnBrk="1" latinLnBrk="0" hangingPunct="1">
       <a:defRPr sz="1800" kern="1200">
         <a:solidFill>
           <a:schemeClr val="tx1"/>
@@ -109,454 +106,10 @@
   </p:defaultTextStyle>
   <p:extLst>
     <p:ext uri="{EFAFB233-063F-42B5-8137-9DF3F51BA10A}">
-      <p15:sldGuideLst xmlns:p15="http://schemas.microsoft.com/office/powerpoint/2012/main">
-        <p15:guide id="1" orient="horz" pos="2160">
-          <p15:clr>
-            <a:srgbClr val="A4A3A4"/>
-          </p15:clr>
-        </p15:guide>
-        <p15:guide id="2" pos="2880">
-          <p15:clr>
-            <a:srgbClr val="A4A3A4"/>
-          </p15:clr>
-        </p15:guide>
-      </p15:sldGuideLst>
+      <p15:sldGuideLst xmlns:p15="http://schemas.microsoft.com/office/powerpoint/2012/main"/>
     </p:ext>
   </p:extLst>
 </p:presentation>
-</file>
-
-<file path=ppt/notesMasters/notesMaster1.xml><?xml version="1.0" encoding="utf-8"?>
-<p:notesMaster xmlns:a="http://schemas.openxmlformats.org/drawingml/2006/main" xmlns:r="http://schemas.openxmlformats.org/officeDocument/2006/relationships" xmlns:p="http://schemas.openxmlformats.org/presentationml/2006/main">
-  <p:cSld>
-    <p:bg>
-      <p:bgRef idx="1001">
-        <a:schemeClr val="bg1"/>
-      </p:bgRef>
-    </p:bg>
-    <p:spTree>
-      <p:nvGrpSpPr>
-        <p:cNvPr id="1" name=""/>
-        <p:cNvGrpSpPr/>
-        <p:nvPr/>
-      </p:nvGrpSpPr>
-      <p:grpSpPr>
-        <a:xfrm>
-          <a:off x="0" y="0"/>
-          <a:ext cx="0" cy="0"/>
-          <a:chOff x="0" y="0"/>
-          <a:chExt cx="0" cy="0"/>
-        </a:xfrm>
-      </p:grpSpPr>
-      <p:sp>
-        <p:nvSpPr>
-          <p:cNvPr id="2" name="Header Placeholder 1"/>
-          <p:cNvSpPr>
-            <a:spLocks noGrp="1"/>
-          </p:cNvSpPr>
-          <p:nvPr>
-            <p:ph type="hdr" sz="quarter"/>
-          </p:nvPr>
-        </p:nvSpPr>
-        <p:spPr>
-          <a:xfrm>
-            <a:off x="0" y="0"/>
-            <a:ext cx="2971800" cy="458788"/>
-          </a:xfrm>
-          <a:prstGeom prst="rect">
-            <a:avLst/>
-          </a:prstGeom>
-        </p:spPr>
-        <p:txBody>
-          <a:bodyPr vert="horz" lIns="91440" tIns="45720" rIns="91440" bIns="45720" rtlCol="0"/>
-          <a:lstStyle>
-            <a:lvl1pPr algn="l">
-              <a:defRPr sz="1200"/>
-            </a:lvl1pPr>
-          </a:lstStyle>
-          <a:p>
-            <a:endParaRPr lang="en-US"/>
-          </a:p>
-        </p:txBody>
-      </p:sp>
-      <p:sp>
-        <p:nvSpPr>
-          <p:cNvPr id="3" name="Date Placeholder 2"/>
-          <p:cNvSpPr>
-            <a:spLocks noGrp="1"/>
-          </p:cNvSpPr>
-          <p:nvPr>
-            <p:ph type="dt" idx="1"/>
-          </p:nvPr>
-        </p:nvSpPr>
-        <p:spPr>
-          <a:xfrm>
-            <a:off x="3884613" y="0"/>
-            <a:ext cx="2971800" cy="458788"/>
-          </a:xfrm>
-          <a:prstGeom prst="rect">
-            <a:avLst/>
-          </a:prstGeom>
-        </p:spPr>
-        <p:txBody>
-          <a:bodyPr vert="horz" lIns="91440" tIns="45720" rIns="91440" bIns="45720" rtlCol="0"/>
-          <a:lstStyle>
-            <a:lvl1pPr algn="r">
-              <a:defRPr sz="1200"/>
-            </a:lvl1pPr>
-          </a:lstStyle>
-          <a:p>
-            <a:fld id="{30C6660F-668D-CC44-B739-05A81FD54A16}" type="datetimeFigureOut">
-              <a:rPr lang="en-US" smtClean="0"/>
-              <a:t>3/9/26</a:t>
-            </a:fld>
-            <a:endParaRPr lang="en-US"/>
-          </a:p>
-        </p:txBody>
-      </p:sp>
-      <p:sp>
-        <p:nvSpPr>
-          <p:cNvPr id="4" name="Slide Image Placeholder 3"/>
-          <p:cNvSpPr>
-            <a:spLocks noGrp="1" noRot="1" noChangeAspect="1"/>
-          </p:cNvSpPr>
-          <p:nvPr>
-            <p:ph type="sldImg" idx="2"/>
-          </p:nvPr>
-        </p:nvSpPr>
-        <p:spPr>
-          <a:xfrm>
-            <a:off x="1371600" y="1143000"/>
-            <a:ext cx="4114800" cy="3086100"/>
-          </a:xfrm>
-          <a:prstGeom prst="rect">
-            <a:avLst/>
-          </a:prstGeom>
-          <a:noFill/>
-          <a:ln w="12700">
-            <a:solidFill>
-              <a:prstClr val="black"/>
-            </a:solidFill>
-          </a:ln>
-        </p:spPr>
-        <p:txBody>
-          <a:bodyPr vert="horz" lIns="91440" tIns="45720" rIns="91440" bIns="45720" rtlCol="0" anchor="ctr"/>
-          <a:lstStyle/>
-          <a:p>
-            <a:endParaRPr lang="en-US"/>
-          </a:p>
-        </p:txBody>
-      </p:sp>
-      <p:sp>
-        <p:nvSpPr>
-          <p:cNvPr id="5" name="Notes Placeholder 4"/>
-          <p:cNvSpPr>
-            <a:spLocks noGrp="1"/>
-          </p:cNvSpPr>
-          <p:nvPr>
-            <p:ph type="body" sz="quarter" idx="3"/>
-          </p:nvPr>
-        </p:nvSpPr>
-        <p:spPr>
-          <a:xfrm>
-            <a:off x="685800" y="4400550"/>
-            <a:ext cx="5486400" cy="3600450"/>
-          </a:xfrm>
-          <a:prstGeom prst="rect">
-            <a:avLst/>
-          </a:prstGeom>
-        </p:spPr>
-        <p:txBody>
-          <a:bodyPr vert="horz" lIns="91440" tIns="45720" rIns="91440" bIns="45720" rtlCol="0"/>
-          <a:lstStyle/>
-          <a:p>
-            <a:pPr lvl="0"/>
-            <a:r>
-              <a:rPr lang="en-US"/>
-              <a:t>Click to edit Master text styles</a:t>
-            </a:r>
-          </a:p>
-          <a:p>
-            <a:pPr lvl="1"/>
-            <a:r>
-              <a:rPr lang="en-US"/>
-              <a:t>Second level</a:t>
-            </a:r>
-          </a:p>
-          <a:p>
-            <a:pPr lvl="2"/>
-            <a:r>
-              <a:rPr lang="en-US"/>
-              <a:t>Third level</a:t>
-            </a:r>
-          </a:p>
-          <a:p>
-            <a:pPr lvl="3"/>
-            <a:r>
-              <a:rPr lang="en-US"/>
-              <a:t>Fourth level</a:t>
-            </a:r>
-          </a:p>
-          <a:p>
-            <a:pPr lvl="4"/>
-            <a:r>
-              <a:rPr lang="en-US"/>
-              <a:t>Fifth level</a:t>
-            </a:r>
-          </a:p>
-        </p:txBody>
-      </p:sp>
-      <p:sp>
-        <p:nvSpPr>
-          <p:cNvPr id="6" name="Footer Placeholder 5"/>
-          <p:cNvSpPr>
-            <a:spLocks noGrp="1"/>
-          </p:cNvSpPr>
-          <p:nvPr>
-            <p:ph type="ftr" sz="quarter" idx="4"/>
-          </p:nvPr>
-        </p:nvSpPr>
-        <p:spPr>
-          <a:xfrm>
-            <a:off x="0" y="8685213"/>
-            <a:ext cx="2971800" cy="458787"/>
-          </a:xfrm>
-          <a:prstGeom prst="rect">
-            <a:avLst/>
-          </a:prstGeom>
-        </p:spPr>
-        <p:txBody>
-          <a:bodyPr vert="horz" lIns="91440" tIns="45720" rIns="91440" bIns="45720" rtlCol="0" anchor="b"/>
-          <a:lstStyle>
-            <a:lvl1pPr algn="l">
-              <a:defRPr sz="1200"/>
-            </a:lvl1pPr>
-          </a:lstStyle>
-          <a:p>
-            <a:endParaRPr lang="en-US"/>
-          </a:p>
-        </p:txBody>
-      </p:sp>
-      <p:sp>
-        <p:nvSpPr>
-          <p:cNvPr id="7" name="Slide Number Placeholder 6"/>
-          <p:cNvSpPr>
-            <a:spLocks noGrp="1"/>
-          </p:cNvSpPr>
-          <p:nvPr>
-            <p:ph type="sldNum" sz="quarter" idx="5"/>
-          </p:nvPr>
-        </p:nvSpPr>
-        <p:spPr>
-          <a:xfrm>
-            <a:off x="3884613" y="8685213"/>
-            <a:ext cx="2971800" cy="458787"/>
-          </a:xfrm>
-          <a:prstGeom prst="rect">
-            <a:avLst/>
-          </a:prstGeom>
-        </p:spPr>
-        <p:txBody>
-          <a:bodyPr vert="horz" lIns="91440" tIns="45720" rIns="91440" bIns="45720" rtlCol="0" anchor="b"/>
-          <a:lstStyle>
-            <a:lvl1pPr algn="r">
-              <a:defRPr sz="1200"/>
-            </a:lvl1pPr>
-          </a:lstStyle>
-          <a:p>
-            <a:fld id="{E0D0D8E5-8789-714A-96F2-FD576461AC11}" type="slidenum">
-              <a:rPr lang="en-US" smtClean="0"/>
-              <a:t>‹#›</a:t>
-            </a:fld>
-            <a:endParaRPr lang="en-US"/>
-          </a:p>
-        </p:txBody>
-      </p:sp>
-    </p:spTree>
-    <p:extLst>
-      <p:ext uri="{BB962C8B-B14F-4D97-AF65-F5344CB8AC3E}">
-        <p14:creationId xmlns:p14="http://schemas.microsoft.com/office/powerpoint/2010/main" val="902111542"/>
-      </p:ext>
-    </p:extLst>
-  </p:cSld>
-  <p:clrMap bg1="lt1" tx1="dk1" bg2="lt2" tx2="dk2" accent1="accent1" accent2="accent2" accent3="accent3" accent4="accent4" accent5="accent5" accent6="accent6" hlink="hlink" folHlink="folHlink"/>
-  <p:notesStyle>
-    <a:lvl1pPr marL="0" algn="l" defTabSz="914400" rtl="0" eaLnBrk="1" latinLnBrk="0" hangingPunct="1">
-      <a:defRPr sz="1200" kern="1200">
-        <a:solidFill>
-          <a:schemeClr val="tx1"/>
-        </a:solidFill>
-        <a:latin typeface="+mn-lt"/>
-        <a:ea typeface="+mn-ea"/>
-        <a:cs typeface="+mn-cs"/>
-      </a:defRPr>
-    </a:lvl1pPr>
-    <a:lvl2pPr marL="457200" algn="l" defTabSz="914400" rtl="0" eaLnBrk="1" latinLnBrk="0" hangingPunct="1">
-      <a:defRPr sz="1200" kern="1200">
-        <a:solidFill>
-          <a:schemeClr val="tx1"/>
-        </a:solidFill>
-        <a:latin typeface="+mn-lt"/>
-        <a:ea typeface="+mn-ea"/>
-        <a:cs typeface="+mn-cs"/>
-      </a:defRPr>
-    </a:lvl2pPr>
-    <a:lvl3pPr marL="914400" algn="l" defTabSz="914400" rtl="0" eaLnBrk="1" latinLnBrk="0" hangingPunct="1">
-      <a:defRPr sz="1200" kern="1200">
-        <a:solidFill>
-          <a:schemeClr val="tx1"/>
-        </a:solidFill>
-        <a:latin typeface="+mn-lt"/>
-        <a:ea typeface="+mn-ea"/>
-        <a:cs typeface="+mn-cs"/>
-      </a:defRPr>
-    </a:lvl3pPr>
-    <a:lvl4pPr marL="1371600" algn="l" defTabSz="914400" rtl="0" eaLnBrk="1" latinLnBrk="0" hangingPunct="1">
-      <a:defRPr sz="1200" kern="1200">
-        <a:solidFill>
-          <a:schemeClr val="tx1"/>
-        </a:solidFill>
-        <a:latin typeface="+mn-lt"/>
-        <a:ea typeface="+mn-ea"/>
-        <a:cs typeface="+mn-cs"/>
-      </a:defRPr>
-    </a:lvl4pPr>
-    <a:lvl5pPr marL="1828800" algn="l" defTabSz="914400" rtl="0" eaLnBrk="1" latinLnBrk="0" hangingPunct="1">
-      <a:defRPr sz="1200" kern="1200">
-        <a:solidFill>
-          <a:schemeClr val="tx1"/>
-        </a:solidFill>
-        <a:latin typeface="+mn-lt"/>
-        <a:ea typeface="+mn-ea"/>
-        <a:cs typeface="+mn-cs"/>
-      </a:defRPr>
-    </a:lvl5pPr>
-    <a:lvl6pPr marL="2286000" algn="l" defTabSz="914400" rtl="0" eaLnBrk="1" latinLnBrk="0" hangingPunct="1">
-      <a:defRPr sz="1200" kern="1200">
-        <a:solidFill>
-          <a:schemeClr val="tx1"/>
-        </a:solidFill>
-        <a:latin typeface="+mn-lt"/>
-        <a:ea typeface="+mn-ea"/>
-        <a:cs typeface="+mn-cs"/>
-      </a:defRPr>
-    </a:lvl6pPr>
-    <a:lvl7pPr marL="2743200" algn="l" defTabSz="914400" rtl="0" eaLnBrk="1" latinLnBrk="0" hangingPunct="1">
-      <a:defRPr sz="1200" kern="1200">
-        <a:solidFill>
-          <a:schemeClr val="tx1"/>
-        </a:solidFill>
-        <a:latin typeface="+mn-lt"/>
-        <a:ea typeface="+mn-ea"/>
-        <a:cs typeface="+mn-cs"/>
-      </a:defRPr>
-    </a:lvl7pPr>
-    <a:lvl8pPr marL="3200400" algn="l" defTabSz="914400" rtl="0" eaLnBrk="1" latinLnBrk="0" hangingPunct="1">
-      <a:defRPr sz="1200" kern="1200">
-        <a:solidFill>
-          <a:schemeClr val="tx1"/>
-        </a:solidFill>
-        <a:latin typeface="+mn-lt"/>
-        <a:ea typeface="+mn-ea"/>
-        <a:cs typeface="+mn-cs"/>
-      </a:defRPr>
-    </a:lvl8pPr>
-    <a:lvl9pPr marL="3657600" algn="l" defTabSz="914400" rtl="0" eaLnBrk="1" latinLnBrk="0" hangingPunct="1">
-      <a:defRPr sz="1200" kern="1200">
-        <a:solidFill>
-          <a:schemeClr val="tx1"/>
-        </a:solidFill>
-        <a:latin typeface="+mn-lt"/>
-        <a:ea typeface="+mn-ea"/>
-        <a:cs typeface="+mn-cs"/>
-      </a:defRPr>
-    </a:lvl9pPr>
-  </p:notesStyle>
-</p:notesMaster>
-</file>
-
-<file path=ppt/notesSlides/notesSlide1.xml><?xml version="1.0" encoding="utf-8"?>
-<p:notes xmlns:a="http://schemas.openxmlformats.org/drawingml/2006/main" xmlns:r="http://schemas.openxmlformats.org/officeDocument/2006/relationships" xmlns:p="http://schemas.openxmlformats.org/presentationml/2006/main">
-  <p:cSld>
-    <p:spTree>
-      <p:nvGrpSpPr>
-        <p:cNvPr id="1" name=""/>
-        <p:cNvGrpSpPr/>
-        <p:nvPr/>
-      </p:nvGrpSpPr>
-      <p:grpSpPr>
-        <a:xfrm>
-          <a:off x="0" y="0"/>
-          <a:ext cx="0" cy="0"/>
-          <a:chOff x="0" y="0"/>
-          <a:chExt cx="0" cy="0"/>
-        </a:xfrm>
-      </p:grpSpPr>
-      <p:sp>
-        <p:nvSpPr>
-          <p:cNvPr id="2" name="Slide Image Placeholder 1"/>
-          <p:cNvSpPr>
-            <a:spLocks noGrp="1" noRot="1" noChangeAspect="1"/>
-          </p:cNvSpPr>
-          <p:nvPr>
-            <p:ph type="sldImg"/>
-          </p:nvPr>
-        </p:nvSpPr>
-        <p:spPr/>
-      </p:sp>
-      <p:sp>
-        <p:nvSpPr>
-          <p:cNvPr id="3" name="Notes Placeholder 2"/>
-          <p:cNvSpPr>
-            <a:spLocks noGrp="1"/>
-          </p:cNvSpPr>
-          <p:nvPr>
-            <p:ph type="body" idx="1"/>
-          </p:nvPr>
-        </p:nvSpPr>
-        <p:spPr/>
-        <p:txBody>
-          <a:bodyPr/>
-          <a:lstStyle/>
-          <a:p>
-            <a:endParaRPr lang="en-US" dirty="0"/>
-          </a:p>
-        </p:txBody>
-      </p:sp>
-      <p:sp>
-        <p:nvSpPr>
-          <p:cNvPr id="4" name="Slide Number Placeholder 3"/>
-          <p:cNvSpPr>
-            <a:spLocks noGrp="1"/>
-          </p:cNvSpPr>
-          <p:nvPr>
-            <p:ph type="sldNum" sz="quarter" idx="5"/>
-          </p:nvPr>
-        </p:nvSpPr>
-        <p:spPr/>
-        <p:txBody>
-          <a:bodyPr/>
-          <a:lstStyle/>
-          <a:p>
-            <a:fld id="{E0D0D8E5-8789-714A-96F2-FD576461AC11}" type="slidenum">
-              <a:rPr lang="en-US" smtClean="0"/>
-              <a:t>1</a:t>
-            </a:fld>
-            <a:endParaRPr lang="en-US"/>
-          </a:p>
-        </p:txBody>
-      </p:sp>
-    </p:spTree>
-    <p:extLst>
-      <p:ext uri="{BB962C8B-B14F-4D97-AF65-F5344CB8AC3E}">
-        <p14:creationId xmlns:p14="http://schemas.microsoft.com/office/powerpoint/2010/main" val="3140367969"/>
-      </p:ext>
-    </p:extLst>
-  </p:cSld>
-  <p:clrMapOvr>
-    <a:masterClrMapping/>
-  </p:clrMapOvr>
-</p:notes>
 </file>
 
 <file path=ppt/slideLayouts/slideLayout1.xml><?xml version="1.0" encoding="utf-8"?>
@@ -578,7 +131,13 @@
       </p:grpSpPr>
       <p:sp>
         <p:nvSpPr>
-          <p:cNvPr id="2" name="Title 1"/>
+          <p:cNvPr id="2" name="Title 1">
+            <a:extLst>
+              <a:ext uri="{FF2B5EF4-FFF2-40B4-BE49-F238E27FC236}">
+                <a16:creationId xmlns:a16="http://schemas.microsoft.com/office/drawing/2014/main" id="{311CDAE5-7DC5-54DB-5DA9-F3DD8689E53E}"/>
+              </a:ext>
+            </a:extLst>
+          </p:cNvPr>
           <p:cNvSpPr>
             <a:spLocks noGrp="1"/>
           </p:cNvSpPr>
@@ -588,13 +147,17 @@
         </p:nvSpPr>
         <p:spPr>
           <a:xfrm>
-            <a:off x="685800" y="2130425"/>
-            <a:ext cx="7772400" cy="1470025"/>
+            <a:off x="1524000" y="1122363"/>
+            <a:ext cx="9144000" cy="2387600"/>
           </a:xfrm>
         </p:spPr>
         <p:txBody>
-          <a:bodyPr/>
-          <a:lstStyle/>
+          <a:bodyPr anchor="b"/>
+          <a:lstStyle>
+            <a:lvl1pPr algn="ctr">
+              <a:defRPr sz="6000"/>
+            </a:lvl1pPr>
+          </a:lstStyle>
           <a:p>
             <a:r>
               <a:rPr lang="en-US"/>
@@ -605,7 +168,13 @@
       </p:sp>
       <p:sp>
         <p:nvSpPr>
-          <p:cNvPr id="3" name="Subtitle 2"/>
+          <p:cNvPr id="3" name="Subtitle 2">
+            <a:extLst>
+              <a:ext uri="{FF2B5EF4-FFF2-40B4-BE49-F238E27FC236}">
+                <a16:creationId xmlns:a16="http://schemas.microsoft.com/office/drawing/2014/main" id="{09C5F58E-D88C-90E2-6095-24D35FB6D1FE}"/>
+              </a:ext>
+            </a:extLst>
+          </p:cNvPr>
           <p:cNvSpPr>
             <a:spLocks noGrp="1"/>
           </p:cNvSpPr>
@@ -615,8 +184,8 @@
         </p:nvSpPr>
         <p:spPr>
           <a:xfrm>
-            <a:off x="1371600" y="3886200"/>
-            <a:ext cx="6400800" cy="1752600"/>
+            <a:off x="1524000" y="3602038"/>
+            <a:ext cx="9144000" cy="1655762"/>
           </a:xfrm>
         </p:spPr>
         <p:txBody>
@@ -624,93 +193,39 @@
           <a:lstStyle>
             <a:lvl1pPr marL="0" indent="0" algn="ctr">
               <a:buNone/>
-              <a:defRPr>
-                <a:solidFill>
-                  <a:schemeClr val="tx1">
-                    <a:tint val="75000"/>
-                  </a:schemeClr>
-                </a:solidFill>
-              </a:defRPr>
+              <a:defRPr sz="2400"/>
             </a:lvl1pPr>
             <a:lvl2pPr marL="457200" indent="0" algn="ctr">
               <a:buNone/>
-              <a:defRPr>
-                <a:solidFill>
-                  <a:schemeClr val="tx1">
-                    <a:tint val="75000"/>
-                  </a:schemeClr>
-                </a:solidFill>
-              </a:defRPr>
+              <a:defRPr sz="2000"/>
             </a:lvl2pPr>
             <a:lvl3pPr marL="914400" indent="0" algn="ctr">
               <a:buNone/>
-              <a:defRPr>
-                <a:solidFill>
-                  <a:schemeClr val="tx1">
-                    <a:tint val="75000"/>
-                  </a:schemeClr>
-                </a:solidFill>
-              </a:defRPr>
+              <a:defRPr sz="1800"/>
             </a:lvl3pPr>
             <a:lvl4pPr marL="1371600" indent="0" algn="ctr">
               <a:buNone/>
-              <a:defRPr>
-                <a:solidFill>
-                  <a:schemeClr val="tx1">
-                    <a:tint val="75000"/>
-                  </a:schemeClr>
-                </a:solidFill>
-              </a:defRPr>
+              <a:defRPr sz="1600"/>
             </a:lvl4pPr>
             <a:lvl5pPr marL="1828800" indent="0" algn="ctr">
               <a:buNone/>
-              <a:defRPr>
-                <a:solidFill>
-                  <a:schemeClr val="tx1">
-                    <a:tint val="75000"/>
-                  </a:schemeClr>
-                </a:solidFill>
-              </a:defRPr>
+              <a:defRPr sz="1600"/>
             </a:lvl5pPr>
             <a:lvl6pPr marL="2286000" indent="0" algn="ctr">
               <a:buNone/>
-              <a:defRPr>
-                <a:solidFill>
-                  <a:schemeClr val="tx1">
-                    <a:tint val="75000"/>
-                  </a:schemeClr>
-                </a:solidFill>
-              </a:defRPr>
+              <a:defRPr sz="1600"/>
             </a:lvl6pPr>
             <a:lvl7pPr marL="2743200" indent="0" algn="ctr">
               <a:buNone/>
-              <a:defRPr>
-                <a:solidFill>
-                  <a:schemeClr val="tx1">
-                    <a:tint val="75000"/>
-                  </a:schemeClr>
-                </a:solidFill>
-              </a:defRPr>
+              <a:defRPr sz="1600"/>
             </a:lvl7pPr>
             <a:lvl8pPr marL="3200400" indent="0" algn="ctr">
               <a:buNone/>
-              <a:defRPr>
-                <a:solidFill>
-                  <a:schemeClr val="tx1">
-                    <a:tint val="75000"/>
-                  </a:schemeClr>
-                </a:solidFill>
-              </a:defRPr>
+              <a:defRPr sz="1600"/>
             </a:lvl8pPr>
             <a:lvl9pPr marL="3657600" indent="0" algn="ctr">
               <a:buNone/>
-              <a:defRPr>
-                <a:solidFill>
-                  <a:schemeClr val="tx1">
-                    <a:tint val="75000"/>
-                  </a:schemeClr>
-                </a:solidFill>
-              </a:defRPr>
+              <a:defRPr sz="1600"/>
             </a:lvl9pPr>
           </a:lstStyle>
           <a:p>
@@ -723,7 +238,13 @@
       </p:sp>
       <p:sp>
         <p:nvSpPr>
-          <p:cNvPr id="4" name="Date Placeholder 3"/>
+          <p:cNvPr id="4" name="Date Placeholder 3">
+            <a:extLst>
+              <a:ext uri="{FF2B5EF4-FFF2-40B4-BE49-F238E27FC236}">
+                <a16:creationId xmlns:a16="http://schemas.microsoft.com/office/drawing/2014/main" id="{9F992EEE-87AE-912A-C188-FE75CC3A6692}"/>
+              </a:ext>
+            </a:extLst>
+          </p:cNvPr>
           <p:cNvSpPr>
             <a:spLocks noGrp="1"/>
           </p:cNvSpPr>
@@ -736,7 +257,7 @@
           <a:bodyPr/>
           <a:lstStyle/>
           <a:p>
-            <a:fld id="{5BCAD085-E8A6-8845-BD4E-CB4CCA059FC4}" type="datetimeFigureOut">
+            <a:fld id="{B57AA481-AB4B-F748-BFA8-91E30705CA13}" type="datetimeFigureOut">
               <a:rPr lang="en-US" smtClean="0"/>
               <a:t>3/9/26</a:t>
             </a:fld>
@@ -746,7 +267,13 @@
       </p:sp>
       <p:sp>
         <p:nvSpPr>
-          <p:cNvPr id="5" name="Footer Placeholder 4"/>
+          <p:cNvPr id="5" name="Footer Placeholder 4">
+            <a:extLst>
+              <a:ext uri="{FF2B5EF4-FFF2-40B4-BE49-F238E27FC236}">
+                <a16:creationId xmlns:a16="http://schemas.microsoft.com/office/drawing/2014/main" id="{2536CD2B-F5E3-D3F5-7D86-E04C6438AD2B}"/>
+              </a:ext>
+            </a:extLst>
+          </p:cNvPr>
           <p:cNvSpPr>
             <a:spLocks noGrp="1"/>
           </p:cNvSpPr>
@@ -765,7 +292,13 @@
       </p:sp>
       <p:sp>
         <p:nvSpPr>
-          <p:cNvPr id="6" name="Slide Number Placeholder 5"/>
+          <p:cNvPr id="6" name="Slide Number Placeholder 5">
+            <a:extLst>
+              <a:ext uri="{FF2B5EF4-FFF2-40B4-BE49-F238E27FC236}">
+                <a16:creationId xmlns:a16="http://schemas.microsoft.com/office/drawing/2014/main" id="{2A9CCEC6-6430-16D7-F534-EC3276EAD287}"/>
+              </a:ext>
+            </a:extLst>
+          </p:cNvPr>
           <p:cNvSpPr>
             <a:spLocks noGrp="1"/>
           </p:cNvSpPr>
@@ -778,7 +311,7 @@
           <a:bodyPr/>
           <a:lstStyle/>
           <a:p>
-            <a:fld id="{C1FF6DA9-008F-8B48-92A6-B652298478BF}" type="slidenum">
+            <a:fld id="{F385B750-BD8D-2244-9B85-62F5954AF7EF}" type="slidenum">
               <a:rPr lang="en-US" smtClean="0"/>
               <a:t>‹#›</a:t>
             </a:fld>
@@ -789,7 +322,7 @@
     </p:spTree>
     <p:extLst>
       <p:ext uri="{BB962C8B-B14F-4D97-AF65-F5344CB8AC3E}">
-        <p14:creationId xmlns:p14="http://schemas.microsoft.com/office/powerpoint/2010/main" val="3168075583"/>
+        <p14:creationId xmlns:p14="http://schemas.microsoft.com/office/powerpoint/2010/main" val="2406852150"/>
       </p:ext>
     </p:extLst>
   </p:cSld>
@@ -818,7 +351,13 @@
       </p:grpSpPr>
       <p:sp>
         <p:nvSpPr>
-          <p:cNvPr id="2" name="Title 1"/>
+          <p:cNvPr id="2" name="Title 1">
+            <a:extLst>
+              <a:ext uri="{FF2B5EF4-FFF2-40B4-BE49-F238E27FC236}">
+                <a16:creationId xmlns:a16="http://schemas.microsoft.com/office/drawing/2014/main" id="{993733F3-A40B-F176-FFC2-67BF83474C1B}"/>
+              </a:ext>
+            </a:extLst>
+          </p:cNvPr>
           <p:cNvSpPr>
             <a:spLocks noGrp="1"/>
           </p:cNvSpPr>
@@ -840,7 +379,13 @@
       </p:sp>
       <p:sp>
         <p:nvSpPr>
-          <p:cNvPr id="3" name="Vertical Text Placeholder 2"/>
+          <p:cNvPr id="3" name="Vertical Text Placeholder 2">
+            <a:extLst>
+              <a:ext uri="{FF2B5EF4-FFF2-40B4-BE49-F238E27FC236}">
+                <a16:creationId xmlns:a16="http://schemas.microsoft.com/office/drawing/2014/main" id="{059F167C-B43D-A6A3-E87F-A939BF7AE601}"/>
+              </a:ext>
+            </a:extLst>
+          </p:cNvPr>
           <p:cNvSpPr>
             <a:spLocks noGrp="1"/>
           </p:cNvSpPr>
@@ -891,7 +436,13 @@
       </p:sp>
       <p:sp>
         <p:nvSpPr>
-          <p:cNvPr id="4" name="Date Placeholder 3"/>
+          <p:cNvPr id="4" name="Date Placeholder 3">
+            <a:extLst>
+              <a:ext uri="{FF2B5EF4-FFF2-40B4-BE49-F238E27FC236}">
+                <a16:creationId xmlns:a16="http://schemas.microsoft.com/office/drawing/2014/main" id="{358EFF5C-9010-C5DB-7EC7-80621103CD01}"/>
+              </a:ext>
+            </a:extLst>
+          </p:cNvPr>
           <p:cNvSpPr>
             <a:spLocks noGrp="1"/>
           </p:cNvSpPr>
@@ -904,7 +455,7 @@
           <a:bodyPr/>
           <a:lstStyle/>
           <a:p>
-            <a:fld id="{5BCAD085-E8A6-8845-BD4E-CB4CCA059FC4}" type="datetimeFigureOut">
+            <a:fld id="{B57AA481-AB4B-F748-BFA8-91E30705CA13}" type="datetimeFigureOut">
               <a:rPr lang="en-US" smtClean="0"/>
               <a:t>3/9/26</a:t>
             </a:fld>
@@ -914,7 +465,13 @@
       </p:sp>
       <p:sp>
         <p:nvSpPr>
-          <p:cNvPr id="5" name="Footer Placeholder 4"/>
+          <p:cNvPr id="5" name="Footer Placeholder 4">
+            <a:extLst>
+              <a:ext uri="{FF2B5EF4-FFF2-40B4-BE49-F238E27FC236}">
+                <a16:creationId xmlns:a16="http://schemas.microsoft.com/office/drawing/2014/main" id="{09A6EF8B-074B-94A4-B24E-1AE82152B9FC}"/>
+              </a:ext>
+            </a:extLst>
+          </p:cNvPr>
           <p:cNvSpPr>
             <a:spLocks noGrp="1"/>
           </p:cNvSpPr>
@@ -933,7 +490,13 @@
       </p:sp>
       <p:sp>
         <p:nvSpPr>
-          <p:cNvPr id="6" name="Slide Number Placeholder 5"/>
+          <p:cNvPr id="6" name="Slide Number Placeholder 5">
+            <a:extLst>
+              <a:ext uri="{FF2B5EF4-FFF2-40B4-BE49-F238E27FC236}">
+                <a16:creationId xmlns:a16="http://schemas.microsoft.com/office/drawing/2014/main" id="{5749A987-F8F7-10C8-5C11-A017C792F2A0}"/>
+              </a:ext>
+            </a:extLst>
+          </p:cNvPr>
           <p:cNvSpPr>
             <a:spLocks noGrp="1"/>
           </p:cNvSpPr>
@@ -946,7 +509,7 @@
           <a:bodyPr/>
           <a:lstStyle/>
           <a:p>
-            <a:fld id="{C1FF6DA9-008F-8B48-92A6-B652298478BF}" type="slidenum">
+            <a:fld id="{F385B750-BD8D-2244-9B85-62F5954AF7EF}" type="slidenum">
               <a:rPr lang="en-US" smtClean="0"/>
               <a:t>‹#›</a:t>
             </a:fld>
@@ -957,7 +520,7 @@
     </p:spTree>
     <p:extLst>
       <p:ext uri="{BB962C8B-B14F-4D97-AF65-F5344CB8AC3E}">
-        <p14:creationId xmlns:p14="http://schemas.microsoft.com/office/powerpoint/2010/main" val="2910927964"/>
+        <p14:creationId xmlns:p14="http://schemas.microsoft.com/office/powerpoint/2010/main" val="3043536397"/>
       </p:ext>
     </p:extLst>
   </p:cSld>
@@ -986,7 +549,13 @@
       </p:grpSpPr>
       <p:sp>
         <p:nvSpPr>
-          <p:cNvPr id="2" name="Vertical Title 1"/>
+          <p:cNvPr id="2" name="Vertical Title 1">
+            <a:extLst>
+              <a:ext uri="{FF2B5EF4-FFF2-40B4-BE49-F238E27FC236}">
+                <a16:creationId xmlns:a16="http://schemas.microsoft.com/office/drawing/2014/main" id="{C2AF7D8F-22E8-FB35-77BD-2B4D215531DF}"/>
+              </a:ext>
+            </a:extLst>
+          </p:cNvPr>
           <p:cNvSpPr>
             <a:spLocks noGrp="1"/>
           </p:cNvSpPr>
@@ -996,8 +565,8 @@
         </p:nvSpPr>
         <p:spPr>
           <a:xfrm>
-            <a:off x="6629400" y="274638"/>
-            <a:ext cx="2057400" cy="5851525"/>
+            <a:off x="8724900" y="365125"/>
+            <a:ext cx="2628900" cy="5811838"/>
           </a:xfrm>
         </p:spPr>
         <p:txBody>
@@ -1013,7 +582,13 @@
       </p:sp>
       <p:sp>
         <p:nvSpPr>
-          <p:cNvPr id="3" name="Vertical Text Placeholder 2"/>
+          <p:cNvPr id="3" name="Vertical Text Placeholder 2">
+            <a:extLst>
+              <a:ext uri="{FF2B5EF4-FFF2-40B4-BE49-F238E27FC236}">
+                <a16:creationId xmlns:a16="http://schemas.microsoft.com/office/drawing/2014/main" id="{EA92DE0F-41BB-5EAC-05D0-D8ADE1727A74}"/>
+              </a:ext>
+            </a:extLst>
+          </p:cNvPr>
           <p:cNvSpPr>
             <a:spLocks noGrp="1"/>
           </p:cNvSpPr>
@@ -1023,8 +598,8 @@
         </p:nvSpPr>
         <p:spPr>
           <a:xfrm>
-            <a:off x="457200" y="274638"/>
-            <a:ext cx="6019800" cy="5851525"/>
+            <a:off x="838200" y="365125"/>
+            <a:ext cx="7734300" cy="5811838"/>
           </a:xfrm>
         </p:spPr>
         <p:txBody>
@@ -1069,7 +644,13 @@
       </p:sp>
       <p:sp>
         <p:nvSpPr>
-          <p:cNvPr id="4" name="Date Placeholder 3"/>
+          <p:cNvPr id="4" name="Date Placeholder 3">
+            <a:extLst>
+              <a:ext uri="{FF2B5EF4-FFF2-40B4-BE49-F238E27FC236}">
+                <a16:creationId xmlns:a16="http://schemas.microsoft.com/office/drawing/2014/main" id="{9E4517B4-4D87-CCCF-DE59-2B2212F23BD6}"/>
+              </a:ext>
+            </a:extLst>
+          </p:cNvPr>
           <p:cNvSpPr>
             <a:spLocks noGrp="1"/>
           </p:cNvSpPr>
@@ -1082,7 +663,7 @@
           <a:bodyPr/>
           <a:lstStyle/>
           <a:p>
-            <a:fld id="{5BCAD085-E8A6-8845-BD4E-CB4CCA059FC4}" type="datetimeFigureOut">
+            <a:fld id="{B57AA481-AB4B-F748-BFA8-91E30705CA13}" type="datetimeFigureOut">
               <a:rPr lang="en-US" smtClean="0"/>
               <a:t>3/9/26</a:t>
             </a:fld>
@@ -1092,7 +673,13 @@
       </p:sp>
       <p:sp>
         <p:nvSpPr>
-          <p:cNvPr id="5" name="Footer Placeholder 4"/>
+          <p:cNvPr id="5" name="Footer Placeholder 4">
+            <a:extLst>
+              <a:ext uri="{FF2B5EF4-FFF2-40B4-BE49-F238E27FC236}">
+                <a16:creationId xmlns:a16="http://schemas.microsoft.com/office/drawing/2014/main" id="{B135715F-E544-5FBA-CD26-49B31D58A0B4}"/>
+              </a:ext>
+            </a:extLst>
+          </p:cNvPr>
           <p:cNvSpPr>
             <a:spLocks noGrp="1"/>
           </p:cNvSpPr>
@@ -1111,7 +698,13 @@
       </p:sp>
       <p:sp>
         <p:nvSpPr>
-          <p:cNvPr id="6" name="Slide Number Placeholder 5"/>
+          <p:cNvPr id="6" name="Slide Number Placeholder 5">
+            <a:extLst>
+              <a:ext uri="{FF2B5EF4-FFF2-40B4-BE49-F238E27FC236}">
+                <a16:creationId xmlns:a16="http://schemas.microsoft.com/office/drawing/2014/main" id="{E660124D-E92F-588C-D85C-1EF3C53ABCF0}"/>
+              </a:ext>
+            </a:extLst>
+          </p:cNvPr>
           <p:cNvSpPr>
             <a:spLocks noGrp="1"/>
           </p:cNvSpPr>
@@ -1124,7 +717,7 @@
           <a:bodyPr/>
           <a:lstStyle/>
           <a:p>
-            <a:fld id="{C1FF6DA9-008F-8B48-92A6-B652298478BF}" type="slidenum">
+            <a:fld id="{F385B750-BD8D-2244-9B85-62F5954AF7EF}" type="slidenum">
               <a:rPr lang="en-US" smtClean="0"/>
               <a:t>‹#›</a:t>
             </a:fld>
@@ -1135,7 +728,7 @@
     </p:spTree>
     <p:extLst>
       <p:ext uri="{BB962C8B-B14F-4D97-AF65-F5344CB8AC3E}">
-        <p14:creationId xmlns:p14="http://schemas.microsoft.com/office/powerpoint/2010/main" val="3612223792"/>
+        <p14:creationId xmlns:p14="http://schemas.microsoft.com/office/powerpoint/2010/main" val="3331358322"/>
       </p:ext>
     </p:extLst>
   </p:cSld>
@@ -1164,7 +757,13 @@
       </p:grpSpPr>
       <p:sp>
         <p:nvSpPr>
-          <p:cNvPr id="2" name="Title 1"/>
+          <p:cNvPr id="2" name="Title 1">
+            <a:extLst>
+              <a:ext uri="{FF2B5EF4-FFF2-40B4-BE49-F238E27FC236}">
+                <a16:creationId xmlns:a16="http://schemas.microsoft.com/office/drawing/2014/main" id="{59949150-F58B-F7DA-78AB-57383FADBEA2}"/>
+              </a:ext>
+            </a:extLst>
+          </p:cNvPr>
           <p:cNvSpPr>
             <a:spLocks noGrp="1"/>
           </p:cNvSpPr>
@@ -1186,7 +785,13 @@
       </p:sp>
       <p:sp>
         <p:nvSpPr>
-          <p:cNvPr id="3" name="Content Placeholder 2"/>
+          <p:cNvPr id="3" name="Content Placeholder 2">
+            <a:extLst>
+              <a:ext uri="{FF2B5EF4-FFF2-40B4-BE49-F238E27FC236}">
+                <a16:creationId xmlns:a16="http://schemas.microsoft.com/office/drawing/2014/main" id="{E7B440F3-3F8A-E3B4-AEE5-7C39CA5DD3F3}"/>
+              </a:ext>
+            </a:extLst>
+          </p:cNvPr>
           <p:cNvSpPr>
             <a:spLocks noGrp="1"/>
           </p:cNvSpPr>
@@ -1237,7 +842,13 @@
       </p:sp>
       <p:sp>
         <p:nvSpPr>
-          <p:cNvPr id="4" name="Date Placeholder 3"/>
+          <p:cNvPr id="4" name="Date Placeholder 3">
+            <a:extLst>
+              <a:ext uri="{FF2B5EF4-FFF2-40B4-BE49-F238E27FC236}">
+                <a16:creationId xmlns:a16="http://schemas.microsoft.com/office/drawing/2014/main" id="{AD9DFF9B-D24F-32C4-B3DA-BA3A5F408DCC}"/>
+              </a:ext>
+            </a:extLst>
+          </p:cNvPr>
           <p:cNvSpPr>
             <a:spLocks noGrp="1"/>
           </p:cNvSpPr>
@@ -1250,7 +861,7 @@
           <a:bodyPr/>
           <a:lstStyle/>
           <a:p>
-            <a:fld id="{5BCAD085-E8A6-8845-BD4E-CB4CCA059FC4}" type="datetimeFigureOut">
+            <a:fld id="{B57AA481-AB4B-F748-BFA8-91E30705CA13}" type="datetimeFigureOut">
               <a:rPr lang="en-US" smtClean="0"/>
               <a:t>3/9/26</a:t>
             </a:fld>
@@ -1260,7 +871,13 @@
       </p:sp>
       <p:sp>
         <p:nvSpPr>
-          <p:cNvPr id="5" name="Footer Placeholder 4"/>
+          <p:cNvPr id="5" name="Footer Placeholder 4">
+            <a:extLst>
+              <a:ext uri="{FF2B5EF4-FFF2-40B4-BE49-F238E27FC236}">
+                <a16:creationId xmlns:a16="http://schemas.microsoft.com/office/drawing/2014/main" id="{0DA91C91-08C2-3C9A-BEE0-13BCE8DD8BF8}"/>
+              </a:ext>
+            </a:extLst>
+          </p:cNvPr>
           <p:cNvSpPr>
             <a:spLocks noGrp="1"/>
           </p:cNvSpPr>
@@ -1279,7 +896,13 @@
       </p:sp>
       <p:sp>
         <p:nvSpPr>
-          <p:cNvPr id="6" name="Slide Number Placeholder 5"/>
+          <p:cNvPr id="6" name="Slide Number Placeholder 5">
+            <a:extLst>
+              <a:ext uri="{FF2B5EF4-FFF2-40B4-BE49-F238E27FC236}">
+                <a16:creationId xmlns:a16="http://schemas.microsoft.com/office/drawing/2014/main" id="{2E99BD42-A7E2-C74F-B3D2-C894093276CE}"/>
+              </a:ext>
+            </a:extLst>
+          </p:cNvPr>
           <p:cNvSpPr>
             <a:spLocks noGrp="1"/>
           </p:cNvSpPr>
@@ -1292,7 +915,7 @@
           <a:bodyPr/>
           <a:lstStyle/>
           <a:p>
-            <a:fld id="{C1FF6DA9-008F-8B48-92A6-B652298478BF}" type="slidenum">
+            <a:fld id="{F385B750-BD8D-2244-9B85-62F5954AF7EF}" type="slidenum">
               <a:rPr lang="en-US" smtClean="0"/>
               <a:t>‹#›</a:t>
             </a:fld>
@@ -1303,7 +926,7 @@
     </p:spTree>
     <p:extLst>
       <p:ext uri="{BB962C8B-B14F-4D97-AF65-F5344CB8AC3E}">
-        <p14:creationId xmlns:p14="http://schemas.microsoft.com/office/powerpoint/2010/main" val="2614314258"/>
+        <p14:creationId xmlns:p14="http://schemas.microsoft.com/office/powerpoint/2010/main" val="2499475293"/>
       </p:ext>
     </p:extLst>
   </p:cSld>
@@ -1332,7 +955,13 @@
       </p:grpSpPr>
       <p:sp>
         <p:nvSpPr>
-          <p:cNvPr id="2" name="Title 1"/>
+          <p:cNvPr id="2" name="Title 1">
+            <a:extLst>
+              <a:ext uri="{FF2B5EF4-FFF2-40B4-BE49-F238E27FC236}">
+                <a16:creationId xmlns:a16="http://schemas.microsoft.com/office/drawing/2014/main" id="{ED70580E-CA87-DCCD-7649-4CC4D82F7A7C}"/>
+              </a:ext>
+            </a:extLst>
+          </p:cNvPr>
           <p:cNvSpPr>
             <a:spLocks noGrp="1"/>
           </p:cNvSpPr>
@@ -1342,15 +971,15 @@
         </p:nvSpPr>
         <p:spPr>
           <a:xfrm>
-            <a:off x="722313" y="4406900"/>
-            <a:ext cx="7772400" cy="1362075"/>
+            <a:off x="831850" y="1709738"/>
+            <a:ext cx="10515600" cy="2852737"/>
           </a:xfrm>
         </p:spPr>
         <p:txBody>
-          <a:bodyPr anchor="t"/>
+          <a:bodyPr anchor="b"/>
           <a:lstStyle>
-            <a:lvl1pPr algn="l">
-              <a:defRPr sz="4000" b="1" cap="all"/>
+            <a:lvl1pPr>
+              <a:defRPr sz="6000"/>
             </a:lvl1pPr>
           </a:lstStyle>
           <a:p>
@@ -1363,7 +992,13 @@
       </p:sp>
       <p:sp>
         <p:nvSpPr>
-          <p:cNvPr id="3" name="Text Placeholder 2"/>
+          <p:cNvPr id="3" name="Text Placeholder 2">
+            <a:extLst>
+              <a:ext uri="{FF2B5EF4-FFF2-40B4-BE49-F238E27FC236}">
+                <a16:creationId xmlns:a16="http://schemas.microsoft.com/office/drawing/2014/main" id="{308331BD-FD2B-9B6F-F581-CEF8F58DB5C2}"/>
+              </a:ext>
+            </a:extLst>
+          </p:cNvPr>
           <p:cNvSpPr>
             <a:spLocks noGrp="1"/>
           </p:cNvSpPr>
@@ -1373,99 +1008,99 @@
         </p:nvSpPr>
         <p:spPr>
           <a:xfrm>
-            <a:off x="722313" y="2906713"/>
-            <a:ext cx="7772400" cy="1500187"/>
+            <a:off x="831850" y="4589463"/>
+            <a:ext cx="10515600" cy="1500187"/>
           </a:xfrm>
         </p:spPr>
         <p:txBody>
-          <a:bodyPr anchor="b"/>
+          <a:bodyPr/>
           <a:lstStyle>
             <a:lvl1pPr marL="0" indent="0">
               <a:buNone/>
-              <a:defRPr sz="2000">
+              <a:defRPr sz="2400">
                 <a:solidFill>
                   <a:schemeClr val="tx1">
-                    <a:tint val="75000"/>
+                    <a:tint val="82000"/>
                   </a:schemeClr>
                 </a:solidFill>
               </a:defRPr>
             </a:lvl1pPr>
             <a:lvl2pPr marL="457200" indent="0">
               <a:buNone/>
-              <a:defRPr sz="1800">
+              <a:defRPr sz="2000">
                 <a:solidFill>
                   <a:schemeClr val="tx1">
-                    <a:tint val="75000"/>
+                    <a:tint val="82000"/>
                   </a:schemeClr>
                 </a:solidFill>
               </a:defRPr>
             </a:lvl2pPr>
             <a:lvl3pPr marL="914400" indent="0">
               <a:buNone/>
-              <a:defRPr sz="1600">
+              <a:defRPr sz="1800">
                 <a:solidFill>
                   <a:schemeClr val="tx1">
-                    <a:tint val="75000"/>
+                    <a:tint val="82000"/>
                   </a:schemeClr>
                 </a:solidFill>
               </a:defRPr>
             </a:lvl3pPr>
             <a:lvl4pPr marL="1371600" indent="0">
               <a:buNone/>
-              <a:defRPr sz="1400">
+              <a:defRPr sz="1600">
                 <a:solidFill>
                   <a:schemeClr val="tx1">
-                    <a:tint val="75000"/>
+                    <a:tint val="82000"/>
                   </a:schemeClr>
                 </a:solidFill>
               </a:defRPr>
             </a:lvl4pPr>
             <a:lvl5pPr marL="1828800" indent="0">
               <a:buNone/>
-              <a:defRPr sz="1400">
+              <a:defRPr sz="1600">
                 <a:solidFill>
                   <a:schemeClr val="tx1">
-                    <a:tint val="75000"/>
+                    <a:tint val="82000"/>
                   </a:schemeClr>
                 </a:solidFill>
               </a:defRPr>
             </a:lvl5pPr>
             <a:lvl6pPr marL="2286000" indent="0">
               <a:buNone/>
-              <a:defRPr sz="1400">
+              <a:defRPr sz="1600">
                 <a:solidFill>
                   <a:schemeClr val="tx1">
-                    <a:tint val="75000"/>
+                    <a:tint val="82000"/>
                   </a:schemeClr>
                 </a:solidFill>
               </a:defRPr>
             </a:lvl6pPr>
             <a:lvl7pPr marL="2743200" indent="0">
               <a:buNone/>
-              <a:defRPr sz="1400">
+              <a:defRPr sz="1600">
                 <a:solidFill>
                   <a:schemeClr val="tx1">
-                    <a:tint val="75000"/>
+                    <a:tint val="82000"/>
                   </a:schemeClr>
                 </a:solidFill>
               </a:defRPr>
             </a:lvl7pPr>
             <a:lvl8pPr marL="3200400" indent="0">
               <a:buNone/>
-              <a:defRPr sz="1400">
+              <a:defRPr sz="1600">
                 <a:solidFill>
                   <a:schemeClr val="tx1">
-                    <a:tint val="75000"/>
+                    <a:tint val="82000"/>
                   </a:schemeClr>
                 </a:solidFill>
               </a:defRPr>
             </a:lvl8pPr>
             <a:lvl9pPr marL="3657600" indent="0">
               <a:buNone/>
-              <a:defRPr sz="1400">
+              <a:defRPr sz="1600">
                 <a:solidFill>
                   <a:schemeClr val="tx1">
-                    <a:tint val="75000"/>
+                    <a:tint val="82000"/>
                   </a:schemeClr>
                 </a:solidFill>
               </a:defRPr>
@@ -1482,7 +1117,13 @@
       </p:sp>
       <p:sp>
         <p:nvSpPr>
-          <p:cNvPr id="4" name="Date Placeholder 3"/>
+          <p:cNvPr id="4" name="Date Placeholder 3">
+            <a:extLst>
+              <a:ext uri="{FF2B5EF4-FFF2-40B4-BE49-F238E27FC236}">
+                <a16:creationId xmlns:a16="http://schemas.microsoft.com/office/drawing/2014/main" id="{5F7327E6-0100-B434-CF1C-EAE9B0E9928C}"/>
+              </a:ext>
+            </a:extLst>
+          </p:cNvPr>
           <p:cNvSpPr>
             <a:spLocks noGrp="1"/>
           </p:cNvSpPr>
@@ -1495,7 +1136,7 @@
           <a:bodyPr/>
           <a:lstStyle/>
           <a:p>
-            <a:fld id="{5BCAD085-E8A6-8845-BD4E-CB4CCA059FC4}" type="datetimeFigureOut">
+            <a:fld id="{B57AA481-AB4B-F748-BFA8-91E30705CA13}" type="datetimeFigureOut">
               <a:rPr lang="en-US" smtClean="0"/>
               <a:t>3/9/26</a:t>
             </a:fld>
@@ -1505,7 +1146,13 @@
       </p:sp>
       <p:sp>
         <p:nvSpPr>
-          <p:cNvPr id="5" name="Footer Placeholder 4"/>
+          <p:cNvPr id="5" name="Footer Placeholder 4">
+            <a:extLst>
+              <a:ext uri="{FF2B5EF4-FFF2-40B4-BE49-F238E27FC236}">
+                <a16:creationId xmlns:a16="http://schemas.microsoft.com/office/drawing/2014/main" id="{1893109E-9417-8E7B-4594-12CE86A643A1}"/>
+              </a:ext>
+            </a:extLst>
+          </p:cNvPr>
           <p:cNvSpPr>
             <a:spLocks noGrp="1"/>
           </p:cNvSpPr>
@@ -1524,7 +1171,13 @@
       </p:sp>
       <p:sp>
         <p:nvSpPr>
-          <p:cNvPr id="6" name="Slide Number Placeholder 5"/>
+          <p:cNvPr id="6" name="Slide Number Placeholder 5">
+            <a:extLst>
+              <a:ext uri="{FF2B5EF4-FFF2-40B4-BE49-F238E27FC236}">
+                <a16:creationId xmlns:a16="http://schemas.microsoft.com/office/drawing/2014/main" id="{26C8DB62-61FE-1D04-EBEA-9F776C5C72E7}"/>
+              </a:ext>
+            </a:extLst>
+          </p:cNvPr>
           <p:cNvSpPr>
             <a:spLocks noGrp="1"/>
           </p:cNvSpPr>
@@ -1537,7 +1190,7 @@
           <a:bodyPr/>
           <a:lstStyle/>
           <a:p>
-            <a:fld id="{C1FF6DA9-008F-8B48-92A6-B652298478BF}" type="slidenum">
+            <a:fld id="{F385B750-BD8D-2244-9B85-62F5954AF7EF}" type="slidenum">
               <a:rPr lang="en-US" smtClean="0"/>
               <a:t>‹#›</a:t>
             </a:fld>
@@ -1548,7 +1201,7 @@
     </p:spTree>
     <p:extLst>
       <p:ext uri="{BB962C8B-B14F-4D97-AF65-F5344CB8AC3E}">
-        <p14:creationId xmlns:p14="http://schemas.microsoft.com/office/powerpoint/2010/main" val="960648375"/>
+        <p14:creationId xmlns:p14="http://schemas.microsoft.com/office/powerpoint/2010/main" val="304734314"/>
       </p:ext>
     </p:extLst>
   </p:cSld>
@@ -1577,7 +1230,13 @@
       </p:grpSpPr>
       <p:sp>
         <p:nvSpPr>
-          <p:cNvPr id="2" name="Title 1"/>
+          <p:cNvPr id="2" name="Title 1">
+            <a:extLst>
+              <a:ext uri="{FF2B5EF4-FFF2-40B4-BE49-F238E27FC236}">
+                <a16:creationId xmlns:a16="http://schemas.microsoft.com/office/drawing/2014/main" id="{CBE56D1D-BB27-AE69-8702-F44C7EF93A7E}"/>
+              </a:ext>
+            </a:extLst>
+          </p:cNvPr>
           <p:cNvSpPr>
             <a:spLocks noGrp="1"/>
           </p:cNvSpPr>
@@ -1599,7 +1258,13 @@
       </p:sp>
       <p:sp>
         <p:nvSpPr>
-          <p:cNvPr id="3" name="Content Placeholder 2"/>
+          <p:cNvPr id="3" name="Content Placeholder 2">
+            <a:extLst>
+              <a:ext uri="{FF2B5EF4-FFF2-40B4-BE49-F238E27FC236}">
+                <a16:creationId xmlns:a16="http://schemas.microsoft.com/office/drawing/2014/main" id="{5CB148F4-8E5F-EE1F-FFA3-0B7BA73F7F5A}"/>
+              </a:ext>
+            </a:extLst>
+          </p:cNvPr>
           <p:cNvSpPr>
             <a:spLocks noGrp="1"/>
           </p:cNvSpPr>
@@ -1609,41 +1274,13 @@
         </p:nvSpPr>
         <p:spPr>
           <a:xfrm>
-            <a:off x="457200" y="1600200"/>
-            <a:ext cx="4038600" cy="4525963"/>
+            <a:off x="838200" y="1825625"/>
+            <a:ext cx="5181600" cy="4351338"/>
           </a:xfrm>
         </p:spPr>
         <p:txBody>
           <a:bodyPr/>
-          <a:lstStyle>
-            <a:lvl1pPr>
-              <a:defRPr sz="2800"/>
-            </a:lvl1pPr>
-            <a:lvl2pPr>
-              <a:defRPr sz="2400"/>
-            </a:lvl2pPr>
-            <a:lvl3pPr>
-              <a:defRPr sz="2000"/>
-            </a:lvl3pPr>
-            <a:lvl4pPr>
-              <a:defRPr sz="1800"/>
-            </a:lvl4pPr>
-            <a:lvl5pPr>
-              <a:defRPr sz="1800"/>
-            </a:lvl5pPr>
-            <a:lvl6pPr>
-              <a:defRPr sz="1800"/>
-            </a:lvl6pPr>
-            <a:lvl7pPr>
-              <a:defRPr sz="1800"/>
-            </a:lvl7pPr>
-            <a:lvl8pPr>
-              <a:defRPr sz="1800"/>
-            </a:lvl8pPr>
-            <a:lvl9pPr>
-              <a:defRPr sz="1800"/>
-            </a:lvl9pPr>
-          </a:lstStyle>
+          <a:lstStyle/>
           <a:p>
             <a:pPr lvl="0"/>
             <a:r>
@@ -1683,7 +1320,13 @@
       </p:sp>
       <p:sp>
         <p:nvSpPr>
-          <p:cNvPr id="4" name="Content Placeholder 3"/>
+          <p:cNvPr id="4" name="Content Placeholder 3">
+            <a:extLst>
+              <a:ext uri="{FF2B5EF4-FFF2-40B4-BE49-F238E27FC236}">
+                <a16:creationId xmlns:a16="http://schemas.microsoft.com/office/drawing/2014/main" id="{5D52F48E-2A6A-538B-5306-0DCE4C645BBF}"/>
+              </a:ext>
+            </a:extLst>
+          </p:cNvPr>
           <p:cNvSpPr>
             <a:spLocks noGrp="1"/>
           </p:cNvSpPr>
@@ -1693,41 +1336,13 @@
         </p:nvSpPr>
         <p:spPr>
           <a:xfrm>
-            <a:off x="4648200" y="1600200"/>
-            <a:ext cx="4038600" cy="4525963"/>
+            <a:off x="6172200" y="1825625"/>
+            <a:ext cx="5181600" cy="4351338"/>
           </a:xfrm>
         </p:spPr>
         <p:txBody>
           <a:bodyPr/>
-          <a:lstStyle>
-            <a:lvl1pPr>
-              <a:defRPr sz="2800"/>
-            </a:lvl1pPr>
-            <a:lvl2pPr>
-              <a:defRPr sz="2400"/>
-            </a:lvl2pPr>
-            <a:lvl3pPr>
-              <a:defRPr sz="2000"/>
-            </a:lvl3pPr>
-            <a:lvl4pPr>
-              <a:defRPr sz="1800"/>
-            </a:lvl4pPr>
-            <a:lvl5pPr>
-              <a:defRPr sz="1800"/>
-            </a:lvl5pPr>
-            <a:lvl6pPr>
-              <a:defRPr sz="1800"/>
-            </a:lvl6pPr>
-            <a:lvl7pPr>
-              <a:defRPr sz="1800"/>
-            </a:lvl7pPr>
-            <a:lvl8pPr>
-              <a:defRPr sz="1800"/>
-            </a:lvl8pPr>
-            <a:lvl9pPr>
-              <a:defRPr sz="1800"/>
-            </a:lvl9pPr>
-          </a:lstStyle>
+          <a:lstStyle/>
           <a:p>
             <a:pPr lvl="0"/>
             <a:r>
@@ -1767,7 +1382,13 @@
       </p:sp>
       <p:sp>
         <p:nvSpPr>
-          <p:cNvPr id="5" name="Date Placeholder 4"/>
+          <p:cNvPr id="5" name="Date Placeholder 4">
+            <a:extLst>
+              <a:ext uri="{FF2B5EF4-FFF2-40B4-BE49-F238E27FC236}">
+                <a16:creationId xmlns:a16="http://schemas.microsoft.com/office/drawing/2014/main" id="{35DAB6D4-520B-85C7-1323-48C1CC181DF2}"/>
+              </a:ext>
+            </a:extLst>
+          </p:cNvPr>
           <p:cNvSpPr>
             <a:spLocks noGrp="1"/>
           </p:cNvSpPr>
@@ -1780,7 +1401,7 @@
           <a:bodyPr/>
           <a:lstStyle/>
           <a:p>
-            <a:fld id="{5BCAD085-E8A6-8845-BD4E-CB4CCA059FC4}" type="datetimeFigureOut">
+            <a:fld id="{B57AA481-AB4B-F748-BFA8-91E30705CA13}" type="datetimeFigureOut">
               <a:rPr lang="en-US" smtClean="0"/>
               <a:t>3/9/26</a:t>
             </a:fld>
@@ -1790,7 +1411,13 @@
       </p:sp>
       <p:sp>
         <p:nvSpPr>
-          <p:cNvPr id="6" name="Footer Placeholder 5"/>
+          <p:cNvPr id="6" name="Footer Placeholder 5">
+            <a:extLst>
+              <a:ext uri="{FF2B5EF4-FFF2-40B4-BE49-F238E27FC236}">
+                <a16:creationId xmlns:a16="http://schemas.microsoft.com/office/drawing/2014/main" id="{FFC51F7D-09CD-139D-D449-74EBC5EA9F81}"/>
+              </a:ext>
+            </a:extLst>
+          </p:cNvPr>
           <p:cNvSpPr>
             <a:spLocks noGrp="1"/>
           </p:cNvSpPr>
@@ -1809,7 +1436,13 @@
       </p:sp>
       <p:sp>
         <p:nvSpPr>
-          <p:cNvPr id="7" name="Slide Number Placeholder 6"/>
+          <p:cNvPr id="7" name="Slide Number Placeholder 6">
+            <a:extLst>
+              <a:ext uri="{FF2B5EF4-FFF2-40B4-BE49-F238E27FC236}">
+                <a16:creationId xmlns:a16="http://schemas.microsoft.com/office/drawing/2014/main" id="{CC4B7BD6-8E29-4285-97AB-A56632232058}"/>
+              </a:ext>
+            </a:extLst>
+          </p:cNvPr>
           <p:cNvSpPr>
             <a:spLocks noGrp="1"/>
           </p:cNvSpPr>
@@ -1822,7 +1455,7 @@
           <a:bodyPr/>
           <a:lstStyle/>
           <a:p>
-            <a:fld id="{C1FF6DA9-008F-8B48-92A6-B652298478BF}" type="slidenum">
+            <a:fld id="{F385B750-BD8D-2244-9B85-62F5954AF7EF}" type="slidenum">
               <a:rPr lang="en-US" smtClean="0"/>
               <a:t>‹#›</a:t>
             </a:fld>
@@ -1833,7 +1466,7 @@
     </p:spTree>
     <p:extLst>
       <p:ext uri="{BB962C8B-B14F-4D97-AF65-F5344CB8AC3E}">
-        <p14:creationId xmlns:p14="http://schemas.microsoft.com/office/powerpoint/2010/main" val="2782244947"/>
+        <p14:creationId xmlns:p14="http://schemas.microsoft.com/office/powerpoint/2010/main" val="2878180203"/>
       </p:ext>
     </p:extLst>
   </p:cSld>
@@ -1862,44 +1495,57 @@
       </p:grpSpPr>
       <p:sp>
         <p:nvSpPr>
-          <p:cNvPr id="2" name="Title 1"/>
+          <p:cNvPr id="2" name="Title 1">
+            <a:extLst>
+              <a:ext uri="{FF2B5EF4-FFF2-40B4-BE49-F238E27FC236}">
+                <a16:creationId xmlns:a16="http://schemas.microsoft.com/office/drawing/2014/main" id="{25D26493-ED33-9B29-0EF3-C4AE83778F9C}"/>
+              </a:ext>
+            </a:extLst>
+          </p:cNvPr>
           <p:cNvSpPr>
             <a:spLocks noGrp="1"/>
           </p:cNvSpPr>
           <p:nvPr>
             <p:ph type="title"/>
-          </p:nvPr>
-        </p:nvSpPr>
-        <p:spPr/>
-        <p:txBody>
-          <a:bodyPr/>
-          <a:lstStyle>
-            <a:lvl1pPr>
-              <a:defRPr/>
-            </a:lvl1pPr>
-          </a:lstStyle>
-          <a:p>
-            <a:r>
-              <a:rPr lang="en-US"/>
-              <a:t>Click to edit Master title style</a:t>
-            </a:r>
-          </a:p>
-        </p:txBody>
-      </p:sp>
-      <p:sp>
-        <p:nvSpPr>
-          <p:cNvPr id="3" name="Text Placeholder 2"/>
-          <p:cNvSpPr>
-            <a:spLocks noGrp="1"/>
-          </p:cNvSpPr>
-          <p:nvPr>
-            <p:ph type="body" idx="1"/>
           </p:nvPr>
         </p:nvSpPr>
         <p:spPr>
           <a:xfrm>
-            <a:off x="457200" y="1535113"/>
-            <a:ext cx="4040188" cy="639762"/>
+            <a:off x="839788" y="365125"/>
+            <a:ext cx="10515600" cy="1325563"/>
+          </a:xfrm>
+        </p:spPr>
+        <p:txBody>
+          <a:bodyPr/>
+          <a:lstStyle/>
+          <a:p>
+            <a:r>
+              <a:rPr lang="en-US"/>
+              <a:t>Click to edit Master title style</a:t>
+            </a:r>
+          </a:p>
+        </p:txBody>
+      </p:sp>
+      <p:sp>
+        <p:nvSpPr>
+          <p:cNvPr id="3" name="Text Placeholder 2">
+            <a:extLst>
+              <a:ext uri="{FF2B5EF4-FFF2-40B4-BE49-F238E27FC236}">
+                <a16:creationId xmlns:a16="http://schemas.microsoft.com/office/drawing/2014/main" id="{B7C4D7B9-8D84-B46A-8763-E9E53AE7EE83}"/>
+              </a:ext>
+            </a:extLst>
+          </p:cNvPr>
+          <p:cNvSpPr>
+            <a:spLocks noGrp="1"/>
+          </p:cNvSpPr>
+          <p:nvPr>
+            <p:ph type="body" idx="1"/>
+          </p:nvPr>
+        </p:nvSpPr>
+        <p:spPr>
+          <a:xfrm>
+            <a:off x="839788" y="1681163"/>
+            <a:ext cx="5157787" cy="823912"/>
           </a:xfrm>
         </p:spPr>
         <p:txBody>
@@ -1953,7 +1599,13 @@
       </p:sp>
       <p:sp>
         <p:nvSpPr>
-          <p:cNvPr id="4" name="Content Placeholder 3"/>
+          <p:cNvPr id="4" name="Content Placeholder 3">
+            <a:extLst>
+              <a:ext uri="{FF2B5EF4-FFF2-40B4-BE49-F238E27FC236}">
+                <a16:creationId xmlns:a16="http://schemas.microsoft.com/office/drawing/2014/main" id="{F657550C-7FE6-BBF1-D5EE-C06B2AA14D87}"/>
+              </a:ext>
+            </a:extLst>
+          </p:cNvPr>
           <p:cNvSpPr>
             <a:spLocks noGrp="1"/>
           </p:cNvSpPr>
@@ -1963,41 +1615,13 @@
         </p:nvSpPr>
         <p:spPr>
           <a:xfrm>
-            <a:off x="457200" y="2174875"/>
-            <a:ext cx="4040188" cy="3951288"/>
+            <a:off x="839788" y="2505075"/>
+            <a:ext cx="5157787" cy="3684588"/>
           </a:xfrm>
         </p:spPr>
         <p:txBody>
           <a:bodyPr/>
-          <a:lstStyle>
-            <a:lvl1pPr>
-              <a:defRPr sz="2400"/>
-            </a:lvl1pPr>
-            <a:lvl2pPr>
-              <a:defRPr sz="2000"/>
-            </a:lvl2pPr>
-            <a:lvl3pPr>
-              <a:defRPr sz="1800"/>
-            </a:lvl3pPr>
-            <a:lvl4pPr>
-              <a:defRPr sz="1600"/>
-            </a:lvl4pPr>
-            <a:lvl5pPr>
-              <a:defRPr sz="1600"/>
-            </a:lvl5pPr>
-            <a:lvl6pPr>
-              <a:defRPr sz="1600"/>
-            </a:lvl6pPr>
-            <a:lvl7pPr>
-              <a:defRPr sz="1600"/>
-            </a:lvl7pPr>
-            <a:lvl8pPr>
-              <a:defRPr sz="1600"/>
-            </a:lvl8pPr>
-            <a:lvl9pPr>
-              <a:defRPr sz="1600"/>
-            </a:lvl9pPr>
-          </a:lstStyle>
+          <a:lstStyle/>
           <a:p>
             <a:pPr lvl="0"/>
             <a:r>
@@ -2037,7 +1661,13 @@
       </p:sp>
       <p:sp>
         <p:nvSpPr>
-          <p:cNvPr id="5" name="Text Placeholder 4"/>
+          <p:cNvPr id="5" name="Text Placeholder 4">
+            <a:extLst>
+              <a:ext uri="{FF2B5EF4-FFF2-40B4-BE49-F238E27FC236}">
+                <a16:creationId xmlns:a16="http://schemas.microsoft.com/office/drawing/2014/main" id="{A9E9AD43-D015-4433-7992-9A4ACECEC003}"/>
+              </a:ext>
+            </a:extLst>
+          </p:cNvPr>
           <p:cNvSpPr>
             <a:spLocks noGrp="1"/>
           </p:cNvSpPr>
@@ -2047,8 +1677,8 @@
         </p:nvSpPr>
         <p:spPr>
           <a:xfrm>
-            <a:off x="4645025" y="1535113"/>
-            <a:ext cx="4041775" cy="639762"/>
+            <a:off x="6172200" y="1681163"/>
+            <a:ext cx="5183188" cy="823912"/>
           </a:xfrm>
         </p:spPr>
         <p:txBody>
@@ -2102,7 +1732,13 @@
       </p:sp>
       <p:sp>
         <p:nvSpPr>
-          <p:cNvPr id="6" name="Content Placeholder 5"/>
+          <p:cNvPr id="6" name="Content Placeholder 5">
+            <a:extLst>
+              <a:ext uri="{FF2B5EF4-FFF2-40B4-BE49-F238E27FC236}">
+                <a16:creationId xmlns:a16="http://schemas.microsoft.com/office/drawing/2014/main" id="{72737DE2-63F1-0A0E-4DD0-BE2EB51B9879}"/>
+              </a:ext>
+            </a:extLst>
+          </p:cNvPr>
           <p:cNvSpPr>
             <a:spLocks noGrp="1"/>
           </p:cNvSpPr>
@@ -2112,41 +1748,13 @@
         </p:nvSpPr>
         <p:spPr>
           <a:xfrm>
-            <a:off x="4645025" y="2174875"/>
-            <a:ext cx="4041775" cy="3951288"/>
+            <a:off x="6172200" y="2505075"/>
+            <a:ext cx="5183188" cy="3684588"/>
           </a:xfrm>
         </p:spPr>
         <p:txBody>
           <a:bodyPr/>
-          <a:lstStyle>
-            <a:lvl1pPr>
-              <a:defRPr sz="2400"/>
-            </a:lvl1pPr>
-            <a:lvl2pPr>
-              <a:defRPr sz="2000"/>
-            </a:lvl2pPr>
-            <a:lvl3pPr>
-              <a:defRPr sz="1800"/>
-            </a:lvl3pPr>
-            <a:lvl4pPr>
-              <a:defRPr sz="1600"/>
-            </a:lvl4pPr>
-            <a:lvl5pPr>
-              <a:defRPr sz="1600"/>
-            </a:lvl5pPr>
-            <a:lvl6pPr>
-              <a:defRPr sz="1600"/>
-            </a:lvl6pPr>
-            <a:lvl7pPr>
-              <a:defRPr sz="1600"/>
-            </a:lvl7pPr>
-            <a:lvl8pPr>
-              <a:defRPr sz="1600"/>
-            </a:lvl8pPr>
-            <a:lvl9pPr>
-              <a:defRPr sz="1600"/>
-            </a:lvl9pPr>
-          </a:lstStyle>
+          <a:lstStyle/>
           <a:p>
             <a:pPr lvl="0"/>
             <a:r>
@@ -2186,7 +1794,13 @@
       </p:sp>
       <p:sp>
         <p:nvSpPr>
-          <p:cNvPr id="7" name="Date Placeholder 6"/>
+          <p:cNvPr id="7" name="Date Placeholder 6">
+            <a:extLst>
+              <a:ext uri="{FF2B5EF4-FFF2-40B4-BE49-F238E27FC236}">
+                <a16:creationId xmlns:a16="http://schemas.microsoft.com/office/drawing/2014/main" id="{3E4EAD5D-E42C-6CB8-3416-AE90B7B0719F}"/>
+              </a:ext>
+            </a:extLst>
+          </p:cNvPr>
           <p:cNvSpPr>
             <a:spLocks noGrp="1"/>
           </p:cNvSpPr>
@@ -2199,7 +1813,7 @@
           <a:bodyPr/>
           <a:lstStyle/>
           <a:p>
-            <a:fld id="{5BCAD085-E8A6-8845-BD4E-CB4CCA059FC4}" type="datetimeFigureOut">
+            <a:fld id="{B57AA481-AB4B-F748-BFA8-91E30705CA13}" type="datetimeFigureOut">
               <a:rPr lang="en-US" smtClean="0"/>
               <a:t>3/9/26</a:t>
             </a:fld>
@@ -2209,7 +1823,13 @@
       </p:sp>
       <p:sp>
         <p:nvSpPr>
-          <p:cNvPr id="8" name="Footer Placeholder 7"/>
+          <p:cNvPr id="8" name="Footer Placeholder 7">
+            <a:extLst>
+              <a:ext uri="{FF2B5EF4-FFF2-40B4-BE49-F238E27FC236}">
+                <a16:creationId xmlns:a16="http://schemas.microsoft.com/office/drawing/2014/main" id="{224E3F7C-453D-0121-4B73-CD2BE18B70D2}"/>
+              </a:ext>
+            </a:extLst>
+          </p:cNvPr>
           <p:cNvSpPr>
             <a:spLocks noGrp="1"/>
           </p:cNvSpPr>
@@ -2228,7 +1848,13 @@
       </p:sp>
       <p:sp>
         <p:nvSpPr>
-          <p:cNvPr id="9" name="Slide Number Placeholder 8"/>
+          <p:cNvPr id="9" name="Slide Number Placeholder 8">
+            <a:extLst>
+              <a:ext uri="{FF2B5EF4-FFF2-40B4-BE49-F238E27FC236}">
+                <a16:creationId xmlns:a16="http://schemas.microsoft.com/office/drawing/2014/main" id="{54DCFA28-DD78-1E1C-02C9-39FB15386CA5}"/>
+              </a:ext>
+            </a:extLst>
+          </p:cNvPr>
           <p:cNvSpPr>
             <a:spLocks noGrp="1"/>
           </p:cNvSpPr>
@@ -2241,7 +1867,7 @@
           <a:bodyPr/>
           <a:lstStyle/>
           <a:p>
-            <a:fld id="{C1FF6DA9-008F-8B48-92A6-B652298478BF}" type="slidenum">
+            <a:fld id="{F385B750-BD8D-2244-9B85-62F5954AF7EF}" type="slidenum">
               <a:rPr lang="en-US" smtClean="0"/>
               <a:t>‹#›</a:t>
             </a:fld>
@@ -2252,7 +1878,7 @@
     </p:spTree>
     <p:extLst>
       <p:ext uri="{BB962C8B-B14F-4D97-AF65-F5344CB8AC3E}">
-        <p14:creationId xmlns:p14="http://schemas.microsoft.com/office/powerpoint/2010/main" val="990158736"/>
+        <p14:creationId xmlns:p14="http://schemas.microsoft.com/office/powerpoint/2010/main" val="2906687877"/>
       </p:ext>
     </p:extLst>
   </p:cSld>
@@ -2281,7 +1907,13 @@
       </p:grpSpPr>
       <p:sp>
         <p:nvSpPr>
-          <p:cNvPr id="2" name="Title 1"/>
+          <p:cNvPr id="2" name="Title 1">
+            <a:extLst>
+              <a:ext uri="{FF2B5EF4-FFF2-40B4-BE49-F238E27FC236}">
+                <a16:creationId xmlns:a16="http://schemas.microsoft.com/office/drawing/2014/main" id="{ECB428DB-2827-6ABE-9E57-93C9DF75369E}"/>
+              </a:ext>
+            </a:extLst>
+          </p:cNvPr>
           <p:cNvSpPr>
             <a:spLocks noGrp="1"/>
           </p:cNvSpPr>
@@ -2303,7 +1935,13 @@
       </p:sp>
       <p:sp>
         <p:nvSpPr>
-          <p:cNvPr id="3" name="Date Placeholder 2"/>
+          <p:cNvPr id="3" name="Date Placeholder 2">
+            <a:extLst>
+              <a:ext uri="{FF2B5EF4-FFF2-40B4-BE49-F238E27FC236}">
+                <a16:creationId xmlns:a16="http://schemas.microsoft.com/office/drawing/2014/main" id="{2D12895F-D3D5-76DC-6100-58B9DF32A9E0}"/>
+              </a:ext>
+            </a:extLst>
+          </p:cNvPr>
           <p:cNvSpPr>
             <a:spLocks noGrp="1"/>
           </p:cNvSpPr>
@@ -2316,7 +1954,7 @@
           <a:bodyPr/>
           <a:lstStyle/>
           <a:p>
-            <a:fld id="{5BCAD085-E8A6-8845-BD4E-CB4CCA059FC4}" type="datetimeFigureOut">
+            <a:fld id="{B57AA481-AB4B-F748-BFA8-91E30705CA13}" type="datetimeFigureOut">
               <a:rPr lang="en-US" smtClean="0"/>
               <a:t>3/9/26</a:t>
             </a:fld>
@@ -2326,7 +1964,13 @@
       </p:sp>
       <p:sp>
         <p:nvSpPr>
-          <p:cNvPr id="4" name="Footer Placeholder 3"/>
+          <p:cNvPr id="4" name="Footer Placeholder 3">
+            <a:extLst>
+              <a:ext uri="{FF2B5EF4-FFF2-40B4-BE49-F238E27FC236}">
+                <a16:creationId xmlns:a16="http://schemas.microsoft.com/office/drawing/2014/main" id="{C9456BB7-2BF9-302D-3951-905597E743AF}"/>
+              </a:ext>
+            </a:extLst>
+          </p:cNvPr>
           <p:cNvSpPr>
             <a:spLocks noGrp="1"/>
           </p:cNvSpPr>
@@ -2345,7 +1989,13 @@
       </p:sp>
       <p:sp>
         <p:nvSpPr>
-          <p:cNvPr id="5" name="Slide Number Placeholder 4"/>
+          <p:cNvPr id="5" name="Slide Number Placeholder 4">
+            <a:extLst>
+              <a:ext uri="{FF2B5EF4-FFF2-40B4-BE49-F238E27FC236}">
+                <a16:creationId xmlns:a16="http://schemas.microsoft.com/office/drawing/2014/main" id="{D6446078-AE23-2846-3BAC-00CABA9758A7}"/>
+              </a:ext>
+            </a:extLst>
+          </p:cNvPr>
           <p:cNvSpPr>
             <a:spLocks noGrp="1"/>
           </p:cNvSpPr>
@@ -2358,7 +2008,7 @@
           <a:bodyPr/>
           <a:lstStyle/>
           <a:p>
-            <a:fld id="{C1FF6DA9-008F-8B48-92A6-B652298478BF}" type="slidenum">
+            <a:fld id="{F385B750-BD8D-2244-9B85-62F5954AF7EF}" type="slidenum">
               <a:rPr lang="en-US" smtClean="0"/>
               <a:t>‹#›</a:t>
             </a:fld>
@@ -2369,7 +2019,7 @@
     </p:spTree>
     <p:extLst>
       <p:ext uri="{BB962C8B-B14F-4D97-AF65-F5344CB8AC3E}">
-        <p14:creationId xmlns:p14="http://schemas.microsoft.com/office/powerpoint/2010/main" val="727027711"/>
+        <p14:creationId xmlns:p14="http://schemas.microsoft.com/office/powerpoint/2010/main" val="2398071991"/>
       </p:ext>
     </p:extLst>
   </p:cSld>
@@ -2398,7 +2048,13 @@
       </p:grpSpPr>
       <p:sp>
         <p:nvSpPr>
-          <p:cNvPr id="2" name="Date Placeholder 1"/>
+          <p:cNvPr id="2" name="Date Placeholder 1">
+            <a:extLst>
+              <a:ext uri="{FF2B5EF4-FFF2-40B4-BE49-F238E27FC236}">
+                <a16:creationId xmlns:a16="http://schemas.microsoft.com/office/drawing/2014/main" id="{0F424540-27FA-B22D-15A5-5316974B7F03}"/>
+              </a:ext>
+            </a:extLst>
+          </p:cNvPr>
           <p:cNvSpPr>
             <a:spLocks noGrp="1"/>
           </p:cNvSpPr>
@@ -2411,7 +2067,7 @@
           <a:bodyPr/>
           <a:lstStyle/>
           <a:p>
-            <a:fld id="{5BCAD085-E8A6-8845-BD4E-CB4CCA059FC4}" type="datetimeFigureOut">
+            <a:fld id="{B57AA481-AB4B-F748-BFA8-91E30705CA13}" type="datetimeFigureOut">
               <a:rPr lang="en-US" smtClean="0"/>
               <a:t>3/9/26</a:t>
             </a:fld>
@@ -2421,7 +2077,13 @@
       </p:sp>
       <p:sp>
         <p:nvSpPr>
-          <p:cNvPr id="3" name="Footer Placeholder 2"/>
+          <p:cNvPr id="3" name="Footer Placeholder 2">
+            <a:extLst>
+              <a:ext uri="{FF2B5EF4-FFF2-40B4-BE49-F238E27FC236}">
+                <a16:creationId xmlns:a16="http://schemas.microsoft.com/office/drawing/2014/main" id="{94BE03B1-518D-03C1-3F54-648A69D966F0}"/>
+              </a:ext>
+            </a:extLst>
+          </p:cNvPr>
           <p:cNvSpPr>
             <a:spLocks noGrp="1"/>
           </p:cNvSpPr>
@@ -2440,7 +2102,13 @@
       </p:sp>
       <p:sp>
         <p:nvSpPr>
-          <p:cNvPr id="4" name="Slide Number Placeholder 3"/>
+          <p:cNvPr id="4" name="Slide Number Placeholder 3">
+            <a:extLst>
+              <a:ext uri="{FF2B5EF4-FFF2-40B4-BE49-F238E27FC236}">
+                <a16:creationId xmlns:a16="http://schemas.microsoft.com/office/drawing/2014/main" id="{6F08C6AD-0CDC-D2AB-1B63-9833E6830913}"/>
+              </a:ext>
+            </a:extLst>
+          </p:cNvPr>
           <p:cNvSpPr>
             <a:spLocks noGrp="1"/>
           </p:cNvSpPr>
@@ -2453,7 +2121,7 @@
           <a:bodyPr/>
           <a:lstStyle/>
           <a:p>
-            <a:fld id="{C1FF6DA9-008F-8B48-92A6-B652298478BF}" type="slidenum">
+            <a:fld id="{F385B750-BD8D-2244-9B85-62F5954AF7EF}" type="slidenum">
               <a:rPr lang="en-US" smtClean="0"/>
               <a:t>‹#›</a:t>
             </a:fld>
@@ -2464,7 +2132,7 @@
     </p:spTree>
     <p:extLst>
       <p:ext uri="{BB962C8B-B14F-4D97-AF65-F5344CB8AC3E}">
-        <p14:creationId xmlns:p14="http://schemas.microsoft.com/office/powerpoint/2010/main" val="1212999818"/>
+        <p14:creationId xmlns:p14="http://schemas.microsoft.com/office/powerpoint/2010/main" val="3775053138"/>
       </p:ext>
     </p:extLst>
   </p:cSld>
@@ -2493,7 +2161,13 @@
       </p:grpSpPr>
       <p:sp>
         <p:nvSpPr>
-          <p:cNvPr id="2" name="Title 1"/>
+          <p:cNvPr id="2" name="Title 1">
+            <a:extLst>
+              <a:ext uri="{FF2B5EF4-FFF2-40B4-BE49-F238E27FC236}">
+                <a16:creationId xmlns:a16="http://schemas.microsoft.com/office/drawing/2014/main" id="{827AB19F-F06F-FE7A-3CD7-E892AB2DD6FD}"/>
+              </a:ext>
+            </a:extLst>
+          </p:cNvPr>
           <p:cNvSpPr>
             <a:spLocks noGrp="1"/>
           </p:cNvSpPr>
@@ -2503,15 +2177,15 @@
         </p:nvSpPr>
         <p:spPr>
           <a:xfrm>
-            <a:off x="457200" y="273050"/>
-            <a:ext cx="3008313" cy="1162050"/>
+            <a:off x="839788" y="457200"/>
+            <a:ext cx="3932237" cy="1600200"/>
           </a:xfrm>
         </p:spPr>
         <p:txBody>
           <a:bodyPr anchor="b"/>
           <a:lstStyle>
-            <a:lvl1pPr algn="l">
-              <a:defRPr sz="2000" b="1"/>
+            <a:lvl1pPr>
+              <a:defRPr sz="3200"/>
             </a:lvl1pPr>
           </a:lstStyle>
           <a:p>
@@ -2524,7 +2198,13 @@
       </p:sp>
       <p:sp>
         <p:nvSpPr>
-          <p:cNvPr id="3" name="Content Placeholder 2"/>
+          <p:cNvPr id="3" name="Content Placeholder 2">
+            <a:extLst>
+              <a:ext uri="{FF2B5EF4-FFF2-40B4-BE49-F238E27FC236}">
+                <a16:creationId xmlns:a16="http://schemas.microsoft.com/office/drawing/2014/main" id="{0456A1F1-D66C-12DF-C509-B8F3282993C8}"/>
+              </a:ext>
+            </a:extLst>
+          </p:cNvPr>
           <p:cNvSpPr>
             <a:spLocks noGrp="1"/>
           </p:cNvSpPr>
@@ -2534,8 +2214,8 @@
         </p:nvSpPr>
         <p:spPr>
           <a:xfrm>
-            <a:off x="3575050" y="273050"/>
-            <a:ext cx="5111750" cy="5853113"/>
+            <a:off x="5183188" y="987425"/>
+            <a:ext cx="6172200" cy="4873625"/>
           </a:xfrm>
         </p:spPr>
         <p:txBody>
@@ -2608,7 +2288,13 @@
       </p:sp>
       <p:sp>
         <p:nvSpPr>
-          <p:cNvPr id="4" name="Text Placeholder 3"/>
+          <p:cNvPr id="4" name="Text Placeholder 3">
+            <a:extLst>
+              <a:ext uri="{FF2B5EF4-FFF2-40B4-BE49-F238E27FC236}">
+                <a16:creationId xmlns:a16="http://schemas.microsoft.com/office/drawing/2014/main" id="{22F0CD0A-5AF7-0670-89DE-C30F4F0F4EC8}"/>
+              </a:ext>
+            </a:extLst>
+          </p:cNvPr>
           <p:cNvSpPr>
             <a:spLocks noGrp="1"/>
           </p:cNvSpPr>
@@ -2618,8 +2304,8 @@
         </p:nvSpPr>
         <p:spPr>
           <a:xfrm>
-            <a:off x="457200" y="1435100"/>
-            <a:ext cx="3008313" cy="4691063"/>
+            <a:off x="839788" y="2057400"/>
+            <a:ext cx="3932237" cy="3811588"/>
           </a:xfrm>
         </p:spPr>
         <p:txBody>
@@ -2627,39 +2313,39 @@
           <a:lstStyle>
             <a:lvl1pPr marL="0" indent="0">
               <a:buNone/>
-              <a:defRPr sz="1400"/>
+              <a:defRPr sz="1600"/>
             </a:lvl1pPr>
             <a:lvl2pPr marL="457200" indent="0">
               <a:buNone/>
-              <a:defRPr sz="1200"/>
+              <a:defRPr sz="1400"/>
             </a:lvl2pPr>
             <a:lvl3pPr marL="914400" indent="0">
               <a:buNone/>
-              <a:defRPr sz="1000"/>
+              <a:defRPr sz="1200"/>
             </a:lvl3pPr>
             <a:lvl4pPr marL="1371600" indent="0">
               <a:buNone/>
-              <a:defRPr sz="900"/>
+              <a:defRPr sz="1000"/>
             </a:lvl4pPr>
             <a:lvl5pPr marL="1828800" indent="0">
               <a:buNone/>
-              <a:defRPr sz="900"/>
+              <a:defRPr sz="1000"/>
             </a:lvl5pPr>
             <a:lvl6pPr marL="2286000" indent="0">
               <a:buNone/>
-              <a:defRPr sz="900"/>
+              <a:defRPr sz="1000"/>
             </a:lvl6pPr>
             <a:lvl7pPr marL="2743200" indent="0">
               <a:buNone/>
-              <a:defRPr sz="900"/>
+              <a:defRPr sz="1000"/>
             </a:lvl7pPr>
             <a:lvl8pPr marL="3200400" indent="0">
               <a:buNone/>
-              <a:defRPr sz="900"/>
+              <a:defRPr sz="1000"/>
             </a:lvl8pPr>
             <a:lvl9pPr marL="3657600" indent="0">
               <a:buNone/>
-              <a:defRPr sz="900"/>
+              <a:defRPr sz="1000"/>
             </a:lvl9pPr>
           </a:lstStyle>
           <a:p>
@@ -2673,7 +2359,13 @@
       </p:sp>
       <p:sp>
         <p:nvSpPr>
-          <p:cNvPr id="5" name="Date Placeholder 4"/>
+          <p:cNvPr id="5" name="Date Placeholder 4">
+            <a:extLst>
+              <a:ext uri="{FF2B5EF4-FFF2-40B4-BE49-F238E27FC236}">
+                <a16:creationId xmlns:a16="http://schemas.microsoft.com/office/drawing/2014/main" id="{51CFC012-B53D-560B-F53E-ED589F2A8ABD}"/>
+              </a:ext>
+            </a:extLst>
+          </p:cNvPr>
           <p:cNvSpPr>
             <a:spLocks noGrp="1"/>
           </p:cNvSpPr>
@@ -2686,7 +2378,7 @@
           <a:bodyPr/>
           <a:lstStyle/>
           <a:p>
-            <a:fld id="{5BCAD085-E8A6-8845-BD4E-CB4CCA059FC4}" type="datetimeFigureOut">
+            <a:fld id="{B57AA481-AB4B-F748-BFA8-91E30705CA13}" type="datetimeFigureOut">
               <a:rPr lang="en-US" smtClean="0"/>
               <a:t>3/9/26</a:t>
             </a:fld>
@@ -2696,7 +2388,13 @@
       </p:sp>
       <p:sp>
         <p:nvSpPr>
-          <p:cNvPr id="6" name="Footer Placeholder 5"/>
+          <p:cNvPr id="6" name="Footer Placeholder 5">
+            <a:extLst>
+              <a:ext uri="{FF2B5EF4-FFF2-40B4-BE49-F238E27FC236}">
+                <a16:creationId xmlns:a16="http://schemas.microsoft.com/office/drawing/2014/main" id="{24F10E26-FA20-0223-2001-62240EABBD70}"/>
+              </a:ext>
+            </a:extLst>
+          </p:cNvPr>
           <p:cNvSpPr>
             <a:spLocks noGrp="1"/>
           </p:cNvSpPr>
@@ -2715,7 +2413,13 @@
       </p:sp>
       <p:sp>
         <p:nvSpPr>
-          <p:cNvPr id="7" name="Slide Number Placeholder 6"/>
+          <p:cNvPr id="7" name="Slide Number Placeholder 6">
+            <a:extLst>
+              <a:ext uri="{FF2B5EF4-FFF2-40B4-BE49-F238E27FC236}">
+                <a16:creationId xmlns:a16="http://schemas.microsoft.com/office/drawing/2014/main" id="{96DC53D6-9A85-D231-EDB0-4CFFD25C66BA}"/>
+              </a:ext>
+            </a:extLst>
+          </p:cNvPr>
           <p:cNvSpPr>
             <a:spLocks noGrp="1"/>
           </p:cNvSpPr>
@@ -2728,7 +2432,7 @@
           <a:bodyPr/>
           <a:lstStyle/>
           <a:p>
-            <a:fld id="{C1FF6DA9-008F-8B48-92A6-B652298478BF}" type="slidenum">
+            <a:fld id="{F385B750-BD8D-2244-9B85-62F5954AF7EF}" type="slidenum">
               <a:rPr lang="en-US" smtClean="0"/>
               <a:t>‹#›</a:t>
             </a:fld>
@@ -2739,7 +2443,7 @@
     </p:spTree>
     <p:extLst>
       <p:ext uri="{BB962C8B-B14F-4D97-AF65-F5344CB8AC3E}">
-        <p14:creationId xmlns:p14="http://schemas.microsoft.com/office/powerpoint/2010/main" val="1840726560"/>
+        <p14:creationId xmlns:p14="http://schemas.microsoft.com/office/powerpoint/2010/main" val="167479013"/>
       </p:ext>
     </p:extLst>
   </p:cSld>
@@ -2768,7 +2472,13 @@
       </p:grpSpPr>
       <p:sp>
         <p:nvSpPr>
-          <p:cNvPr id="2" name="Title 1"/>
+          <p:cNvPr id="2" name="Title 1">
+            <a:extLst>
+              <a:ext uri="{FF2B5EF4-FFF2-40B4-BE49-F238E27FC236}">
+                <a16:creationId xmlns:a16="http://schemas.microsoft.com/office/drawing/2014/main" id="{8F3009D8-FC99-0C03-54F3-6E4DC1B14564}"/>
+              </a:ext>
+            </a:extLst>
+          </p:cNvPr>
           <p:cNvSpPr>
             <a:spLocks noGrp="1"/>
           </p:cNvSpPr>
@@ -2778,15 +2488,15 @@
         </p:nvSpPr>
         <p:spPr>
           <a:xfrm>
-            <a:off x="1792288" y="4800600"/>
-            <a:ext cx="5486400" cy="566738"/>
+            <a:off x="839788" y="457200"/>
+            <a:ext cx="3932237" cy="1600200"/>
           </a:xfrm>
         </p:spPr>
         <p:txBody>
           <a:bodyPr anchor="b"/>
           <a:lstStyle>
-            <a:lvl1pPr algn="l">
-              <a:defRPr sz="2000" b="1"/>
+            <a:lvl1pPr>
+              <a:defRPr sz="3200"/>
             </a:lvl1pPr>
           </a:lstStyle>
           <a:p>
@@ -2799,7 +2509,13 @@
       </p:sp>
       <p:sp>
         <p:nvSpPr>
-          <p:cNvPr id="3" name="Picture Placeholder 2"/>
+          <p:cNvPr id="3" name="Picture Placeholder 2">
+            <a:extLst>
+              <a:ext uri="{FF2B5EF4-FFF2-40B4-BE49-F238E27FC236}">
+                <a16:creationId xmlns:a16="http://schemas.microsoft.com/office/drawing/2014/main" id="{98BDAEBD-6D22-FD1B-2E57-EABF5500E4D0}"/>
+              </a:ext>
+            </a:extLst>
+          </p:cNvPr>
           <p:cNvSpPr>
             <a:spLocks noGrp="1"/>
           </p:cNvSpPr>
@@ -2809,8 +2525,8 @@
         </p:nvSpPr>
         <p:spPr>
           <a:xfrm>
-            <a:off x="1792288" y="612775"/>
-            <a:ext cx="5486400" cy="4114800"/>
+            <a:off x="5183188" y="987425"/>
+            <a:ext cx="6172200" cy="4873625"/>
           </a:xfrm>
         </p:spPr>
         <p:txBody>
@@ -2860,7 +2576,13 @@
       </p:sp>
       <p:sp>
         <p:nvSpPr>
-          <p:cNvPr id="4" name="Text Placeholder 3"/>
+          <p:cNvPr id="4" name="Text Placeholder 3">
+            <a:extLst>
+              <a:ext uri="{FF2B5EF4-FFF2-40B4-BE49-F238E27FC236}">
+                <a16:creationId xmlns:a16="http://schemas.microsoft.com/office/drawing/2014/main" id="{E9EB7B40-D6D2-C837-E192-285B4EDF1C8E}"/>
+              </a:ext>
+            </a:extLst>
+          </p:cNvPr>
           <p:cNvSpPr>
             <a:spLocks noGrp="1"/>
           </p:cNvSpPr>
@@ -2870,8 +2592,8 @@
         </p:nvSpPr>
         <p:spPr>
           <a:xfrm>
-            <a:off x="1792288" y="5367338"/>
-            <a:ext cx="5486400" cy="804862"/>
+            <a:off x="839788" y="2057400"/>
+            <a:ext cx="3932237" cy="3811588"/>
           </a:xfrm>
         </p:spPr>
         <p:txBody>
@@ -2879,39 +2601,39 @@
           <a:lstStyle>
             <a:lvl1pPr marL="0" indent="0">
               <a:buNone/>
-              <a:defRPr sz="1400"/>
+              <a:defRPr sz="1600"/>
             </a:lvl1pPr>
             <a:lvl2pPr marL="457200" indent="0">
               <a:buNone/>
-              <a:defRPr sz="1200"/>
+              <a:defRPr sz="1400"/>
             </a:lvl2pPr>
             <a:lvl3pPr marL="914400" indent="0">
               <a:buNone/>
-              <a:defRPr sz="1000"/>
+              <a:defRPr sz="1200"/>
             </a:lvl3pPr>
             <a:lvl4pPr marL="1371600" indent="0">
               <a:buNone/>
-              <a:defRPr sz="900"/>
+              <a:defRPr sz="1000"/>
             </a:lvl4pPr>
             <a:lvl5pPr marL="1828800" indent="0">
               <a:buNone/>
-              <a:defRPr sz="900"/>
+              <a:defRPr sz="1000"/>
             </a:lvl5pPr>
             <a:lvl6pPr marL="2286000" indent="0">
               <a:buNone/>
-              <a:defRPr sz="900"/>
+              <a:defRPr sz="1000"/>
             </a:lvl6pPr>
             <a:lvl7pPr marL="2743200" indent="0">
               <a:buNone/>
-              <a:defRPr sz="900"/>
+              <a:defRPr sz="1000"/>
             </a:lvl7pPr>
             <a:lvl8pPr marL="3200400" indent="0">
               <a:buNone/>
-              <a:defRPr sz="900"/>
+              <a:defRPr sz="1000"/>
             </a:lvl8pPr>
             <a:lvl9pPr marL="3657600" indent="0">
               <a:buNone/>
-              <a:defRPr sz="900"/>
+              <a:defRPr sz="1000"/>
             </a:lvl9pPr>
           </a:lstStyle>
           <a:p>
@@ -2925,7 +2647,13 @@
       </p:sp>
       <p:sp>
         <p:nvSpPr>
-          <p:cNvPr id="5" name="Date Placeholder 4"/>
+          <p:cNvPr id="5" name="Date Placeholder 4">
+            <a:extLst>
+              <a:ext uri="{FF2B5EF4-FFF2-40B4-BE49-F238E27FC236}">
+                <a16:creationId xmlns:a16="http://schemas.microsoft.com/office/drawing/2014/main" id="{E6FAAD95-6FCF-2DC6-874F-A562DE99710F}"/>
+              </a:ext>
+            </a:extLst>
+          </p:cNvPr>
           <p:cNvSpPr>
             <a:spLocks noGrp="1"/>
           </p:cNvSpPr>
@@ -2938,7 +2666,7 @@
           <a:bodyPr/>
           <a:lstStyle/>
           <a:p>
-            <a:fld id="{5BCAD085-E8A6-8845-BD4E-CB4CCA059FC4}" type="datetimeFigureOut">
+            <a:fld id="{B57AA481-AB4B-F748-BFA8-91E30705CA13}" type="datetimeFigureOut">
               <a:rPr lang="en-US" smtClean="0"/>
               <a:t>3/9/26</a:t>
             </a:fld>
@@ -2948,7 +2676,13 @@
       </p:sp>
       <p:sp>
         <p:nvSpPr>
-          <p:cNvPr id="6" name="Footer Placeholder 5"/>
+          <p:cNvPr id="6" name="Footer Placeholder 5">
+            <a:extLst>
+              <a:ext uri="{FF2B5EF4-FFF2-40B4-BE49-F238E27FC236}">
+                <a16:creationId xmlns:a16="http://schemas.microsoft.com/office/drawing/2014/main" id="{096411F4-B471-9FFA-F765-4EF152975F95}"/>
+              </a:ext>
+            </a:extLst>
+          </p:cNvPr>
           <p:cNvSpPr>
             <a:spLocks noGrp="1"/>
           </p:cNvSpPr>
@@ -2967,7 +2701,13 @@
       </p:sp>
       <p:sp>
         <p:nvSpPr>
-          <p:cNvPr id="7" name="Slide Number Placeholder 6"/>
+          <p:cNvPr id="7" name="Slide Number Placeholder 6">
+            <a:extLst>
+              <a:ext uri="{FF2B5EF4-FFF2-40B4-BE49-F238E27FC236}">
+                <a16:creationId xmlns:a16="http://schemas.microsoft.com/office/drawing/2014/main" id="{CDC02AF0-5A20-4F28-C982-419F5A1B1A24}"/>
+              </a:ext>
+            </a:extLst>
+          </p:cNvPr>
           <p:cNvSpPr>
             <a:spLocks noGrp="1"/>
           </p:cNvSpPr>
@@ -2980,7 +2720,7 @@
           <a:bodyPr/>
           <a:lstStyle/>
           <a:p>
-            <a:fld id="{C1FF6DA9-008F-8B48-92A6-B652298478BF}" type="slidenum">
+            <a:fld id="{F385B750-BD8D-2244-9B85-62F5954AF7EF}" type="slidenum">
               <a:rPr lang="en-US" smtClean="0"/>
               <a:t>‹#›</a:t>
             </a:fld>
@@ -2991,7 +2731,7 @@
     </p:spTree>
     <p:extLst>
       <p:ext uri="{BB962C8B-B14F-4D97-AF65-F5344CB8AC3E}">
-        <p14:creationId xmlns:p14="http://schemas.microsoft.com/office/powerpoint/2010/main" val="3889236939"/>
+        <p14:creationId xmlns:p14="http://schemas.microsoft.com/office/powerpoint/2010/main" val="2585483982"/>
       </p:ext>
     </p:extLst>
   </p:cSld>
@@ -3025,7 +2765,13 @@
       </p:grpSpPr>
       <p:sp>
         <p:nvSpPr>
-          <p:cNvPr id="2" name="Title Placeholder 1"/>
+          <p:cNvPr id="2" name="Title Placeholder 1">
+            <a:extLst>
+              <a:ext uri="{FF2B5EF4-FFF2-40B4-BE49-F238E27FC236}">
+                <a16:creationId xmlns:a16="http://schemas.microsoft.com/office/drawing/2014/main" id="{23468808-87C9-7228-C558-8EB5637BF1D2}"/>
+              </a:ext>
+            </a:extLst>
+          </p:cNvPr>
           <p:cNvSpPr>
             <a:spLocks noGrp="1"/>
           </p:cNvSpPr>
@@ -3035,8 +2781,8 @@
         </p:nvSpPr>
         <p:spPr>
           <a:xfrm>
-            <a:off x="457200" y="274638"/>
-            <a:ext cx="8229600" cy="1143000"/>
+            <a:off x="838200" y="365125"/>
+            <a:ext cx="10515600" cy="1325563"/>
           </a:xfrm>
           <a:prstGeom prst="rect">
             <a:avLst/>
@@ -3057,7 +2803,13 @@
       </p:sp>
       <p:sp>
         <p:nvSpPr>
-          <p:cNvPr id="3" name="Text Placeholder 2"/>
+          <p:cNvPr id="3" name="Text Placeholder 2">
+            <a:extLst>
+              <a:ext uri="{FF2B5EF4-FFF2-40B4-BE49-F238E27FC236}">
+                <a16:creationId xmlns:a16="http://schemas.microsoft.com/office/drawing/2014/main" id="{B9C40541-D17A-6DE8-0028-EA06C42B5092}"/>
+              </a:ext>
+            </a:extLst>
+          </p:cNvPr>
           <p:cNvSpPr>
             <a:spLocks noGrp="1"/>
           </p:cNvSpPr>
@@ -3067,8 +2819,8 @@
         </p:nvSpPr>
         <p:spPr>
           <a:xfrm>
-            <a:off x="457200" y="1600200"/>
-            <a:ext cx="8229600" cy="4525963"/>
+            <a:off x="838200" y="1825625"/>
+            <a:ext cx="10515600" cy="4351338"/>
           </a:xfrm>
           <a:prstGeom prst="rect">
             <a:avLst/>
@@ -3118,7 +2870,13 @@
       </p:sp>
       <p:sp>
         <p:nvSpPr>
-          <p:cNvPr id="4" name="Date Placeholder 3"/>
+          <p:cNvPr id="4" name="Date Placeholder 3">
+            <a:extLst>
+              <a:ext uri="{FF2B5EF4-FFF2-40B4-BE49-F238E27FC236}">
+                <a16:creationId xmlns:a16="http://schemas.microsoft.com/office/drawing/2014/main" id="{4BCB82F0-B92B-0676-8AC8-F782D80381D0}"/>
+              </a:ext>
+            </a:extLst>
+          </p:cNvPr>
           <p:cNvSpPr>
             <a:spLocks noGrp="1"/>
           </p:cNvSpPr>
@@ -3128,8 +2886,8 @@
         </p:nvSpPr>
         <p:spPr>
           <a:xfrm>
-            <a:off x="457200" y="6356350"/>
-            <a:ext cx="2133600" cy="365125"/>
+            <a:off x="838200" y="6356350"/>
+            <a:ext cx="2743200" cy="365125"/>
           </a:xfrm>
           <a:prstGeom prst="rect">
             <a:avLst/>
@@ -3142,14 +2900,14 @@
               <a:defRPr sz="1200">
                 <a:solidFill>
                   <a:schemeClr val="tx1">
-                    <a:tint val="75000"/>
+                    <a:tint val="82000"/>
                   </a:schemeClr>
                 </a:solidFill>
               </a:defRPr>
             </a:lvl1pPr>
           </a:lstStyle>
           <a:p>
-            <a:fld id="{5BCAD085-E8A6-8845-BD4E-CB4CCA059FC4}" type="datetimeFigureOut">
+            <a:fld id="{B57AA481-AB4B-F748-BFA8-91E30705CA13}" type="datetimeFigureOut">
               <a:rPr lang="en-US" smtClean="0"/>
               <a:t>3/9/26</a:t>
             </a:fld>
@@ -3159,7 +2917,13 @@
       </p:sp>
       <p:sp>
         <p:nvSpPr>
-          <p:cNvPr id="5" name="Footer Placeholder 4"/>
+          <p:cNvPr id="5" name="Footer Placeholder 4">
+            <a:extLst>
+              <a:ext uri="{FF2B5EF4-FFF2-40B4-BE49-F238E27FC236}">
+                <a16:creationId xmlns:a16="http://schemas.microsoft.com/office/drawing/2014/main" id="{2A7FC4F3-D94B-2381-D733-B38EBED0412C}"/>
+              </a:ext>
+            </a:extLst>
+          </p:cNvPr>
           <p:cNvSpPr>
             <a:spLocks noGrp="1"/>
           </p:cNvSpPr>
@@ -3169,8 +2933,8 @@
         </p:nvSpPr>
         <p:spPr>
           <a:xfrm>
-            <a:off x="3124200" y="6356350"/>
-            <a:ext cx="2895600" cy="365125"/>
+            <a:off x="4038600" y="6356350"/>
+            <a:ext cx="4114800" cy="365125"/>
           </a:xfrm>
           <a:prstGeom prst="rect">
             <a:avLst/>
@@ -3183,7 +2947,7 @@
               <a:defRPr sz="1200">
                 <a:solidFill>
                   <a:schemeClr val="tx1">
-                    <a:tint val="75000"/>
+                    <a:tint val="82000"/>
                   </a:schemeClr>
                 </a:solidFill>
               </a:defRPr>
@@ -3196,7 +2960,13 @@
       </p:sp>
       <p:sp>
         <p:nvSpPr>
-          <p:cNvPr id="6" name="Slide Number Placeholder 5"/>
+          <p:cNvPr id="6" name="Slide Number Placeholder 5">
+            <a:extLst>
+              <a:ext uri="{FF2B5EF4-FFF2-40B4-BE49-F238E27FC236}">
+                <a16:creationId xmlns:a16="http://schemas.microsoft.com/office/drawing/2014/main" id="{020CA999-E995-8FD9-E622-9AF1DB31AC2B}"/>
+              </a:ext>
+            </a:extLst>
+          </p:cNvPr>
           <p:cNvSpPr>
             <a:spLocks noGrp="1"/>
           </p:cNvSpPr>
@@ -3206,8 +2976,8 @@
         </p:nvSpPr>
         <p:spPr>
           <a:xfrm>
-            <a:off x="6553200" y="6356350"/>
-            <a:ext cx="2133600" cy="365125"/>
+            <a:off x="8610600" y="6356350"/>
+            <a:ext cx="2743200" cy="365125"/>
           </a:xfrm>
           <a:prstGeom prst="rect">
             <a:avLst/>
@@ -3220,14 +2990,14 @@
               <a:defRPr sz="1200">
                 <a:solidFill>
                   <a:schemeClr val="tx1">
-                    <a:tint val="75000"/>
+                    <a:tint val="82000"/>
                   </a:schemeClr>
                 </a:solidFill>
               </a:defRPr>
             </a:lvl1pPr>
           </a:lstStyle>
           <a:p>
-            <a:fld id="{C1FF6DA9-008F-8B48-92A6-B652298478BF}" type="slidenum">
+            <a:fld id="{F385B750-BD8D-2244-9B85-62F5954AF7EF}" type="slidenum">
               <a:rPr lang="en-US" smtClean="0"/>
               <a:t>‹#›</a:t>
             </a:fld>
@@ -3238,7 +3008,7 @@
     </p:spTree>
     <p:extLst>
       <p:ext uri="{BB962C8B-B14F-4D97-AF65-F5344CB8AC3E}">
-        <p14:creationId xmlns:p14="http://schemas.microsoft.com/office/powerpoint/2010/main" val="2209977519"/>
+        <p14:creationId xmlns:p14="http://schemas.microsoft.com/office/powerpoint/2010/main" val="1316762192"/>
       </p:ext>
     </p:extLst>
   </p:cSld>
@@ -3258,7 +3028,10 @@
   </p:sldLayoutIdLst>
   <p:txStyles>
     <p:titleStyle>
-      <a:lvl1pPr algn="ctr" defTabSz="457200" rtl="0" eaLnBrk="1" latinLnBrk="0" hangingPunct="1">
+      <a:lvl1pPr algn="l" defTabSz="914400" rtl="0" eaLnBrk="1" latinLnBrk="0" hangingPunct="1">
+        <a:lnSpc>
+          <a:spcPct val="90000"/>
+        </a:lnSpc>
         <a:spcBef>
           <a:spcPct val="0"/>
         </a:spcBef>
@@ -3274,13 +3047,16 @@
       </a:lvl1pPr>
     </p:titleStyle>
     <p:bodyStyle>
-      <a:lvl1pPr marL="342900" indent="-342900" algn="l" defTabSz="457200" rtl="0" eaLnBrk="1" latinLnBrk="0" hangingPunct="1">
+      <a:lvl1pPr marL="228600" indent="-228600" algn="l" defTabSz="914400" rtl="0" eaLnBrk="1" latinLnBrk="0" hangingPunct="1">
+        <a:lnSpc>
+          <a:spcPct val="90000"/>
+        </a:lnSpc>
         <a:spcBef>
-          <a:spcPct val="20000"/>
+          <a:spcPts val="1000"/>
         </a:spcBef>
-        <a:buFont typeface="Arial"/>
+        <a:buFont typeface="Arial" panose="020B0604020202020204" pitchFamily="34" charset="0"/>
         <a:buChar char="•"/>
-        <a:defRPr sz="3200" kern="1200">
+        <a:defRPr sz="2800" kern="1200">
           <a:solidFill>
             <a:schemeClr val="tx1"/>
           </a:solidFill>
@@ -3289,26 +3065,14 @@
           <a:cs typeface="+mn-cs"/>
         </a:defRPr>
       </a:lvl1pPr>
-      <a:lvl2pPr marL="742950" indent="-285750" algn="l" defTabSz="457200" rtl="0" eaLnBrk="1" latinLnBrk="0" hangingPunct="1">
+      <a:lvl2pPr marL="685800" indent="-228600" algn="l" defTabSz="914400" rtl="0" eaLnBrk="1" latinLnBrk="0" hangingPunct="1">
+        <a:lnSpc>
+          <a:spcPct val="90000"/>
+        </a:lnSpc>
         <a:spcBef>
-          <a:spcPct val="20000"/>
+          <a:spcPts val="500"/>
         </a:spcBef>
-        <a:buFont typeface="Arial"/>
-        <a:buChar char="–"/>
-        <a:defRPr sz="2800" kern="1200">
-          <a:solidFill>
-            <a:schemeClr val="tx1"/>
-          </a:solidFill>
-          <a:latin typeface="+mn-lt"/>
-          <a:ea typeface="+mn-ea"/>
-          <a:cs typeface="+mn-cs"/>
-        </a:defRPr>
-      </a:lvl2pPr>
-      <a:lvl3pPr marL="1143000" indent="-228600" algn="l" defTabSz="457200" rtl="0" eaLnBrk="1" latinLnBrk="0" hangingPunct="1">
-        <a:spcBef>
-          <a:spcPct val="20000"/>
-        </a:spcBef>
-        <a:buFont typeface="Arial"/>
+        <a:buFont typeface="Arial" panose="020B0604020202020204" pitchFamily="34" charset="0"/>
         <a:buChar char="•"/>
         <a:defRPr sz="2400" kern="1200">
           <a:solidFill>
@@ -3318,42 +3082,15 @@
           <a:ea typeface="+mn-ea"/>
           <a:cs typeface="+mn-cs"/>
         </a:defRPr>
-      </a:lvl3pPr>
-      <a:lvl4pPr marL="1600200" indent="-228600" algn="l" defTabSz="457200" rtl="0" eaLnBrk="1" latinLnBrk="0" hangingPunct="1">
+      </a:lvl2pPr>
+      <a:lvl3pPr marL="1143000" indent="-228600" algn="l" defTabSz="914400" rtl="0" eaLnBrk="1" latinLnBrk="0" hangingPunct="1">
+        <a:lnSpc>
+          <a:spcPct val="90000"/>
+        </a:lnSpc>
         <a:spcBef>
-          <a:spcPct val="20000"/>
+          <a:spcPts val="500"/>
         </a:spcBef>
-        <a:buFont typeface="Arial"/>
-        <a:buChar char="–"/>
-        <a:defRPr sz="2000" kern="1200">
-          <a:solidFill>
-            <a:schemeClr val="tx1"/>
-          </a:solidFill>
-          <a:latin typeface="+mn-lt"/>
-          <a:ea typeface="+mn-ea"/>
-          <a:cs typeface="+mn-cs"/>
-        </a:defRPr>
-      </a:lvl4pPr>
-      <a:lvl5pPr marL="2057400" indent="-228600" algn="l" defTabSz="457200" rtl="0" eaLnBrk="1" latinLnBrk="0" hangingPunct="1">
-        <a:spcBef>
-          <a:spcPct val="20000"/>
-        </a:spcBef>
-        <a:buFont typeface="Arial"/>
-        <a:buChar char="»"/>
-        <a:defRPr sz="2000" kern="1200">
-          <a:solidFill>
-            <a:schemeClr val="tx1"/>
-          </a:solidFill>
-          <a:latin typeface="+mn-lt"/>
-          <a:ea typeface="+mn-ea"/>
-          <a:cs typeface="+mn-cs"/>
-        </a:defRPr>
-      </a:lvl5pPr>
-      <a:lvl6pPr marL="2514600" indent="-228600" algn="l" defTabSz="457200" rtl="0" eaLnBrk="1" latinLnBrk="0" hangingPunct="1">
-        <a:spcBef>
-          <a:spcPct val="20000"/>
-        </a:spcBef>
-        <a:buFont typeface="Arial"/>
+        <a:buFont typeface="Arial" panose="020B0604020202020204" pitchFamily="34" charset="0"/>
         <a:buChar char="•"/>
         <a:defRPr sz="2000" kern="1200">
           <a:solidFill>
@@ -3363,14 +3100,71 @@
           <a:ea typeface="+mn-ea"/>
           <a:cs typeface="+mn-cs"/>
         </a:defRPr>
+      </a:lvl3pPr>
+      <a:lvl4pPr marL="1600200" indent="-228600" algn="l" defTabSz="914400" rtl="0" eaLnBrk="1" latinLnBrk="0" hangingPunct="1">
+        <a:lnSpc>
+          <a:spcPct val="90000"/>
+        </a:lnSpc>
+        <a:spcBef>
+          <a:spcPts val="500"/>
+        </a:spcBef>
+        <a:buFont typeface="Arial" panose="020B0604020202020204" pitchFamily="34" charset="0"/>
+        <a:buChar char="•"/>
+        <a:defRPr sz="1800" kern="1200">
+          <a:solidFill>
+            <a:schemeClr val="tx1"/>
+          </a:solidFill>
+          <a:latin typeface="+mn-lt"/>
+          <a:ea typeface="+mn-ea"/>
+          <a:cs typeface="+mn-cs"/>
+        </a:defRPr>
+      </a:lvl4pPr>
+      <a:lvl5pPr marL="2057400" indent="-228600" algn="l" defTabSz="914400" rtl="0" eaLnBrk="1" latinLnBrk="0" hangingPunct="1">
+        <a:lnSpc>
+          <a:spcPct val="90000"/>
+        </a:lnSpc>
+        <a:spcBef>
+          <a:spcPts val="500"/>
+        </a:spcBef>
+        <a:buFont typeface="Arial" panose="020B0604020202020204" pitchFamily="34" charset="0"/>
+        <a:buChar char="•"/>
+        <a:defRPr sz="1800" kern="1200">
+          <a:solidFill>
+            <a:schemeClr val="tx1"/>
+          </a:solidFill>
+          <a:latin typeface="+mn-lt"/>
+          <a:ea typeface="+mn-ea"/>
+          <a:cs typeface="+mn-cs"/>
+        </a:defRPr>
+      </a:lvl5pPr>
+      <a:lvl6pPr marL="2514600" indent="-228600" algn="l" defTabSz="914400" rtl="0" eaLnBrk="1" latinLnBrk="0" hangingPunct="1">
+        <a:lnSpc>
+          <a:spcPct val="90000"/>
+        </a:lnSpc>
+        <a:spcBef>
+          <a:spcPts val="500"/>
+        </a:spcBef>
+        <a:buFont typeface="Arial" panose="020B0604020202020204" pitchFamily="34" charset="0"/>
+        <a:buChar char="•"/>
+        <a:defRPr sz="1800" kern="1200">
+          <a:solidFill>
+            <a:schemeClr val="tx1"/>
+          </a:solidFill>
+          <a:latin typeface="+mn-lt"/>
+          <a:ea typeface="+mn-ea"/>
+          <a:cs typeface="+mn-cs"/>
+        </a:defRPr>
       </a:lvl6pPr>
-      <a:lvl7pPr marL="2971800" indent="-228600" algn="l" defTabSz="457200" rtl="0" eaLnBrk="1" latinLnBrk="0" hangingPunct="1">
+      <a:lvl7pPr marL="2971800" indent="-228600" algn="l" defTabSz="914400" rtl="0" eaLnBrk="1" latinLnBrk="0" hangingPunct="1">
+        <a:lnSpc>
+          <a:spcPct val="90000"/>
+        </a:lnSpc>
         <a:spcBef>
-          <a:spcPct val="20000"/>
+          <a:spcPts val="500"/>
         </a:spcBef>
-        <a:buFont typeface="Arial"/>
+        <a:buFont typeface="Arial" panose="020B0604020202020204" pitchFamily="34" charset="0"/>
         <a:buChar char="•"/>
-        <a:defRPr sz="2000" kern="1200">
+        <a:defRPr sz="1800" kern="1200">
           <a:solidFill>
             <a:schemeClr val="tx1"/>
           </a:solidFill>
@@ -3379,13 +3173,16 @@
           <a:cs typeface="+mn-cs"/>
         </a:defRPr>
       </a:lvl7pPr>
-      <a:lvl8pPr marL="3429000" indent="-228600" algn="l" defTabSz="457200" rtl="0" eaLnBrk="1" latinLnBrk="0" hangingPunct="1">
+      <a:lvl8pPr marL="3429000" indent="-228600" algn="l" defTabSz="914400" rtl="0" eaLnBrk="1" latinLnBrk="0" hangingPunct="1">
+        <a:lnSpc>
+          <a:spcPct val="90000"/>
+        </a:lnSpc>
         <a:spcBef>
-          <a:spcPct val="20000"/>
+          <a:spcPts val="500"/>
         </a:spcBef>
-        <a:buFont typeface="Arial"/>
+        <a:buFont typeface="Arial" panose="020B0604020202020204" pitchFamily="34" charset="0"/>
         <a:buChar char="•"/>
-        <a:defRPr sz="2000" kern="1200">
+        <a:defRPr sz="1800" kern="1200">
           <a:solidFill>
             <a:schemeClr val="tx1"/>
           </a:solidFill>
@@ -3394,13 +3191,16 @@
           <a:cs typeface="+mn-cs"/>
         </a:defRPr>
       </a:lvl8pPr>
-      <a:lvl9pPr marL="3886200" indent="-228600" algn="l" defTabSz="457200" rtl="0" eaLnBrk="1" latinLnBrk="0" hangingPunct="1">
+      <a:lvl9pPr marL="3886200" indent="-228600" algn="l" defTabSz="914400" rtl="0" eaLnBrk="1" latinLnBrk="0" hangingPunct="1">
+        <a:lnSpc>
+          <a:spcPct val="90000"/>
+        </a:lnSpc>
         <a:spcBef>
-          <a:spcPct val="20000"/>
+          <a:spcPts val="500"/>
         </a:spcBef>
-        <a:buFont typeface="Arial"/>
+        <a:buFont typeface="Arial" panose="020B0604020202020204" pitchFamily="34" charset="0"/>
         <a:buChar char="•"/>
-        <a:defRPr sz="2000" kern="1200">
+        <a:defRPr sz="1800" kern="1200">
           <a:solidFill>
             <a:schemeClr val="tx1"/>
           </a:solidFill>
@@ -3414,7 +3214,7 @@
       <a:defPPr>
         <a:defRPr lang="en-US"/>
       </a:defPPr>
-      <a:lvl1pPr marL="0" algn="l" defTabSz="457200" rtl="0" eaLnBrk="1" latinLnBrk="0" hangingPunct="1">
+      <a:lvl1pPr marL="0" algn="l" defTabSz="914400" rtl="0" eaLnBrk="1" latinLnBrk="0" hangingPunct="1">
         <a:defRPr sz="1800" kern="1200">
           <a:solidFill>
             <a:schemeClr val="tx1"/>
@@ -3424,7 +3224,7 @@
           <a:cs typeface="+mn-cs"/>
         </a:defRPr>
       </a:lvl1pPr>
-      <a:lvl2pPr marL="457200" algn="l" defTabSz="457200" rtl="0" eaLnBrk="1" latinLnBrk="0" hangingPunct="1">
+      <a:lvl2pPr marL="457200" algn="l" defTabSz="914400" rtl="0" eaLnBrk="1" latinLnBrk="0" hangingPunct="1">
         <a:defRPr sz="1800" kern="1200">
           <a:solidFill>
             <a:schemeClr val="tx1"/>
@@ -3434,7 +3234,7 @@
           <a:cs typeface="+mn-cs"/>
         </a:defRPr>
       </a:lvl2pPr>
-      <a:lvl3pPr marL="914400" algn="l" defTabSz="457200" rtl="0" eaLnBrk="1" latinLnBrk="0" hangingPunct="1">
+      <a:lvl3pPr marL="914400" algn="l" defTabSz="914400" rtl="0" eaLnBrk="1" latinLnBrk="0" hangingPunct="1">
         <a:defRPr sz="1800" kern="1200">
           <a:solidFill>
             <a:schemeClr val="tx1"/>
@@ -3444,7 +3244,7 @@
           <a:cs typeface="+mn-cs"/>
         </a:defRPr>
       </a:lvl3pPr>
-      <a:lvl4pPr marL="1371600" algn="l" defTabSz="457200" rtl="0" eaLnBrk="1" latinLnBrk="0" hangingPunct="1">
+      <a:lvl4pPr marL="1371600" algn="l" defTabSz="914400" rtl="0" eaLnBrk="1" latinLnBrk="0" hangingPunct="1">
         <a:defRPr sz="1800" kern="1200">
           <a:solidFill>
             <a:schemeClr val="tx1"/>
@@ -3454,7 +3254,7 @@
           <a:cs typeface="+mn-cs"/>
         </a:defRPr>
       </a:lvl4pPr>
-      <a:lvl5pPr marL="1828800" algn="l" defTabSz="457200" rtl="0" eaLnBrk="1" latinLnBrk="0" hangingPunct="1">
+      <a:lvl5pPr marL="1828800" algn="l" defTabSz="914400" rtl="0" eaLnBrk="1" latinLnBrk="0" hangingPunct="1">
         <a:defRPr sz="1800" kern="1200">
           <a:solidFill>
             <a:schemeClr val="tx1"/>
@@ -3464,7 +3264,7 @@
           <a:cs typeface="+mn-cs"/>
         </a:defRPr>
       </a:lvl5pPr>
-      <a:lvl6pPr marL="2286000" algn="l" defTabSz="457200" rtl="0" eaLnBrk="1" latinLnBrk="0" hangingPunct="1">
+      <a:lvl6pPr marL="2286000" algn="l" defTabSz="914400" rtl="0" eaLnBrk="1" latinLnBrk="0" hangingPunct="1">
         <a:defRPr sz="1800" kern="1200">
           <a:solidFill>
             <a:schemeClr val="tx1"/>
@@ -3474,7 +3274,7 @@
           <a:cs typeface="+mn-cs"/>
         </a:defRPr>
       </a:lvl6pPr>
-      <a:lvl7pPr marL="2743200" algn="l" defTabSz="457200" rtl="0" eaLnBrk="1" latinLnBrk="0" hangingPunct="1">
+      <a:lvl7pPr marL="2743200" algn="l" defTabSz="914400" rtl="0" eaLnBrk="1" latinLnBrk="0" hangingPunct="1">
         <a:defRPr sz="1800" kern="1200">
           <a:solidFill>
             <a:schemeClr val="tx1"/>
@@ -3484,7 +3284,7 @@
           <a:cs typeface="+mn-cs"/>
         </a:defRPr>
       </a:lvl7pPr>
-      <a:lvl8pPr marL="3200400" algn="l" defTabSz="457200" rtl="0" eaLnBrk="1" latinLnBrk="0" hangingPunct="1">
+      <a:lvl8pPr marL="3200400" algn="l" defTabSz="914400" rtl="0" eaLnBrk="1" latinLnBrk="0" hangingPunct="1">
         <a:defRPr sz="1800" kern="1200">
           <a:solidFill>
             <a:schemeClr val="tx1"/>
@@ -3494,7 +3294,7 @@
           <a:cs typeface="+mn-cs"/>
         </a:defRPr>
       </a:lvl8pPr>
-      <a:lvl9pPr marL="3657600" algn="l" defTabSz="457200" rtl="0" eaLnBrk="1" latinLnBrk="0" hangingPunct="1">
+      <a:lvl9pPr marL="3657600" algn="l" defTabSz="914400" rtl="0" eaLnBrk="1" latinLnBrk="0" hangingPunct="1">
         <a:defRPr sz="1800" kern="1200">
           <a:solidFill>
             <a:schemeClr val="tx1"/>
@@ -3526,697 +3326,42 @@
           <a:chExt cx="0" cy="0"/>
         </a:xfrm>
       </p:grpSpPr>
-      <p:sp>
-        <p:nvSpPr>
-          <p:cNvPr id="2" name="Cloud 1"/>
-          <p:cNvSpPr/>
+      <p:pic>
+        <p:nvPicPr>
+          <p:cNvPr id="10" name="Picture 9" descr="A diagram of a cloud&#10;&#10;AI-generated content may be incorrect.">
+            <a:extLst>
+              <a:ext uri="{FF2B5EF4-FFF2-40B4-BE49-F238E27FC236}">
+                <a16:creationId xmlns:a16="http://schemas.microsoft.com/office/drawing/2014/main" id="{468CBAE6-EB38-8D18-CF34-84058FA5D4C7}"/>
+              </a:ext>
+            </a:extLst>
+          </p:cNvPr>
+          <p:cNvPicPr>
+            <a:picLocks noChangeAspect="1"/>
+          </p:cNvPicPr>
           <p:nvPr/>
-        </p:nvSpPr>
+        </p:nvPicPr>
+        <p:blipFill>
+          <a:blip r:embed="rId2"/>
+          <a:stretch>
+            <a:fillRect/>
+          </a:stretch>
+        </p:blipFill>
         <p:spPr>
           <a:xfrm>
-            <a:off x="1463040" y="1195845"/>
-            <a:ext cx="5669280" cy="3566160"/>
-          </a:xfrm>
-          <a:prstGeom prst="cloud">
-            <a:avLst/>
-          </a:prstGeom>
-          <a:solidFill>
-            <a:srgbClr val="E1F0FF"/>
-          </a:solidFill>
-          <a:ln>
-            <a:solidFill>
-              <a:srgbClr val="787878"/>
-            </a:solidFill>
-          </a:ln>
-        </p:spPr>
-        <p:style>
-          <a:lnRef idx="1">
-            <a:schemeClr val="accent1"/>
-          </a:lnRef>
-          <a:fillRef idx="3">
-            <a:schemeClr val="accent1"/>
-          </a:fillRef>
-          <a:effectRef idx="2">
-            <a:schemeClr val="accent1"/>
-          </a:effectRef>
-          <a:fontRef idx="minor">
-            <a:schemeClr val="lt1"/>
-          </a:fontRef>
-        </p:style>
-        <p:txBody>
-          <a:bodyPr rtlCol="0" anchor="ctr"/>
-          <a:lstStyle/>
-          <a:p>
-            <a:pPr algn="ctr"/>
-            <a:endParaRPr/>
-          </a:p>
-        </p:txBody>
-      </p:sp>
-      <p:sp>
-        <p:nvSpPr>
-          <p:cNvPr id="3" name="Rectangle 2"/>
-          <p:cNvSpPr/>
-          <p:nvPr/>
-        </p:nvSpPr>
-        <p:spPr>
-          <a:xfrm>
-            <a:off x="182880" y="1561605"/>
-            <a:ext cx="1645920" cy="731520"/>
+            <a:off x="551543" y="407981"/>
+            <a:ext cx="10755085" cy="5860143"/>
           </a:xfrm>
           <a:prstGeom prst="rect">
             <a:avLst/>
           </a:prstGeom>
-          <a:solidFill>
-            <a:srgbClr val="FFFFFF"/>
-          </a:solidFill>
-          <a:ln>
-            <a:solidFill>
-              <a:srgbClr val="505050"/>
-            </a:solidFill>
-          </a:ln>
         </p:spPr>
-        <p:style>
-          <a:lnRef idx="1">
-            <a:schemeClr val="accent1"/>
-          </a:lnRef>
-          <a:fillRef idx="3">
-            <a:schemeClr val="accent1"/>
-          </a:fillRef>
-          <a:effectRef idx="2">
-            <a:schemeClr val="accent1"/>
-          </a:effectRef>
-          <a:fontRef idx="minor">
-            <a:schemeClr val="lt1"/>
-          </a:fontRef>
-        </p:style>
-        <p:txBody>
-          <a:bodyPr rtlCol="0" anchor="ctr"/>
-          <a:lstStyle/>
-          <a:p>
-            <a:pPr>
-              <a:defRPr sz="1008">
-                <a:solidFill>
-                  <a:srgbClr val="000000"/>
-                </a:solidFill>
-              </a:defRPr>
-            </a:pPr>
-            <a:r>
-              <a:t>Oracle Fusion apps</a:t>
-            </a:r>
-          </a:p>
-        </p:txBody>
-      </p:sp>
-      <p:sp>
-        <p:nvSpPr>
-          <p:cNvPr id="4" name="Rectangle 3"/>
-          <p:cNvSpPr/>
-          <p:nvPr/>
-        </p:nvSpPr>
-        <p:spPr>
-          <a:xfrm>
-            <a:off x="182880" y="2658885"/>
-            <a:ext cx="1645920" cy="731520"/>
-          </a:xfrm>
-          <a:prstGeom prst="rect">
-            <a:avLst/>
-          </a:prstGeom>
-          <a:solidFill>
-            <a:srgbClr val="FFFFFF"/>
-          </a:solidFill>
-          <a:ln>
-            <a:solidFill>
-              <a:srgbClr val="505050"/>
-            </a:solidFill>
-          </a:ln>
-        </p:spPr>
-        <p:style>
-          <a:lnRef idx="1">
-            <a:schemeClr val="accent1"/>
-          </a:lnRef>
-          <a:fillRef idx="3">
-            <a:schemeClr val="accent1"/>
-          </a:fillRef>
-          <a:effectRef idx="2">
-            <a:schemeClr val="accent1"/>
-          </a:effectRef>
-          <a:fontRef idx="minor">
-            <a:schemeClr val="lt1"/>
-          </a:fontRef>
-        </p:style>
-        <p:txBody>
-          <a:bodyPr rtlCol="0" anchor="ctr"/>
-          <a:lstStyle/>
-          <a:p>
-            <a:pPr>
-              <a:defRPr sz="1008">
-                <a:solidFill>
-                  <a:srgbClr val="000000"/>
-                </a:solidFill>
-              </a:defRPr>
-            </a:pPr>
-            <a:r>
-              <a:t>DTUBasen</a:t>
-            </a:r>
-          </a:p>
-        </p:txBody>
-      </p:sp>
-      <p:sp>
-        <p:nvSpPr>
-          <p:cNvPr id="5" name="Rectangle 4"/>
-          <p:cNvSpPr/>
-          <p:nvPr/>
-        </p:nvSpPr>
-        <p:spPr>
-          <a:xfrm>
-            <a:off x="182880" y="3756165"/>
-            <a:ext cx="1645920" cy="731520"/>
-          </a:xfrm>
-          <a:prstGeom prst="rect">
-            <a:avLst/>
-          </a:prstGeom>
-          <a:solidFill>
-            <a:srgbClr val="FFFFFF"/>
-          </a:solidFill>
-          <a:ln>
-            <a:solidFill>
-              <a:srgbClr val="505050"/>
-            </a:solidFill>
-          </a:ln>
-        </p:spPr>
-        <p:style>
-          <a:lnRef idx="1">
-            <a:schemeClr val="accent1"/>
-          </a:lnRef>
-          <a:fillRef idx="3">
-            <a:schemeClr val="accent1"/>
-          </a:fillRef>
-          <a:effectRef idx="2">
-            <a:schemeClr val="accent1"/>
-          </a:effectRef>
-          <a:fontRef idx="minor">
-            <a:schemeClr val="lt1"/>
-          </a:fontRef>
-        </p:style>
-        <p:txBody>
-          <a:bodyPr rtlCol="0" anchor="ctr"/>
-          <a:lstStyle/>
-          <a:p>
-            <a:pPr>
-              <a:defRPr sz="1008">
-                <a:solidFill>
-                  <a:srgbClr val="000000"/>
-                </a:solidFill>
-              </a:defRPr>
-            </a:pPr>
-            <a:r>
-              <a:t>Student Source</a:t>
-            </a:r>
-          </a:p>
-        </p:txBody>
-      </p:sp>
-      <p:sp>
-        <p:nvSpPr>
-          <p:cNvPr id="6" name="Rounded Rectangle 5"/>
-          <p:cNvSpPr/>
-          <p:nvPr/>
-        </p:nvSpPr>
-        <p:spPr>
-          <a:xfrm>
-            <a:off x="2103120" y="1883229"/>
-            <a:ext cx="1347651" cy="2079206"/>
-          </a:xfrm>
-          <a:prstGeom prst="roundRect">
-            <a:avLst/>
-          </a:prstGeom>
-          <a:solidFill>
-            <a:schemeClr val="bg1">
-              <a:lumMod val="85000"/>
-            </a:schemeClr>
-          </a:solidFill>
-          <a:ln>
-            <a:solidFill>
-              <a:srgbClr val="505050"/>
-            </a:solidFill>
-          </a:ln>
-        </p:spPr>
-        <p:style>
-          <a:lnRef idx="1">
-            <a:schemeClr val="accent1"/>
-          </a:lnRef>
-          <a:fillRef idx="3">
-            <a:schemeClr val="accent1"/>
-          </a:fillRef>
-          <a:effectRef idx="2">
-            <a:schemeClr val="accent1"/>
-          </a:effectRef>
-          <a:fontRef idx="minor">
-            <a:schemeClr val="lt1"/>
-          </a:fontRef>
-        </p:style>
-        <p:txBody>
-          <a:bodyPr rtlCol="0" anchor="ctr"/>
-          <a:lstStyle/>
-          <a:p>
-            <a:endParaRPr dirty="0"/>
-          </a:p>
-        </p:txBody>
-      </p:sp>
-      <p:sp>
-        <p:nvSpPr>
-          <p:cNvPr id="7" name="Rectangle 6"/>
-          <p:cNvSpPr/>
-          <p:nvPr/>
-        </p:nvSpPr>
-        <p:spPr>
-          <a:xfrm>
-            <a:off x="2286000" y="2044931"/>
-            <a:ext cx="914400" cy="437012"/>
-          </a:xfrm>
-          <a:prstGeom prst="rect">
-            <a:avLst/>
-          </a:prstGeom>
-          <a:solidFill>
-            <a:schemeClr val="bg1"/>
-          </a:solidFill>
-          <a:ln>
-            <a:solidFill>
-              <a:srgbClr val="505050"/>
-            </a:solidFill>
-          </a:ln>
-        </p:spPr>
-        <p:style>
-          <a:lnRef idx="1">
-            <a:schemeClr val="accent1"/>
-          </a:lnRef>
-          <a:fillRef idx="3">
-            <a:schemeClr val="accent1"/>
-          </a:fillRef>
-          <a:effectRef idx="2">
-            <a:schemeClr val="accent1"/>
-          </a:effectRef>
-          <a:fontRef idx="minor">
-            <a:schemeClr val="lt1"/>
-          </a:fontRef>
-        </p:style>
-        <p:txBody>
-          <a:bodyPr rtlCol="0" anchor="ctr"/>
-          <a:lstStyle/>
-          <a:p>
-            <a:pPr algn="ctr">
-              <a:defRPr sz="1008">
-                <a:solidFill>
-                  <a:srgbClr val="000000"/>
-                </a:solidFill>
-              </a:defRPr>
-            </a:pPr>
-            <a:r>
-              <a:rPr dirty="0"/>
-              <a:t>Employee </a:t>
-            </a:r>
-          </a:p>
-        </p:txBody>
-      </p:sp>
-      <p:sp>
-        <p:nvSpPr>
-          <p:cNvPr id="8" name="Rectangle 7"/>
-          <p:cNvSpPr/>
-          <p:nvPr/>
-        </p:nvSpPr>
-        <p:spPr>
-          <a:xfrm>
-            <a:off x="2286000" y="2683823"/>
-            <a:ext cx="914400" cy="914400"/>
-          </a:xfrm>
-          <a:prstGeom prst="rect">
-            <a:avLst/>
-          </a:prstGeom>
-          <a:solidFill>
-            <a:schemeClr val="bg1"/>
-          </a:solidFill>
-          <a:ln>
-            <a:solidFill>
-              <a:srgbClr val="505050"/>
-            </a:solidFill>
-          </a:ln>
-        </p:spPr>
-        <p:style>
-          <a:lnRef idx="1">
-            <a:schemeClr val="accent1"/>
-          </a:lnRef>
-          <a:fillRef idx="3">
-            <a:schemeClr val="accent1"/>
-          </a:fillRef>
-          <a:effectRef idx="2">
-            <a:schemeClr val="accent1"/>
-          </a:effectRef>
-          <a:fontRef idx="minor">
-            <a:schemeClr val="lt1"/>
-          </a:fontRef>
-        </p:style>
-        <p:txBody>
-          <a:bodyPr rtlCol="0" anchor="ctr"/>
-          <a:lstStyle/>
-          <a:p>
-            <a:pPr>
-              <a:defRPr sz="1008">
-                <a:solidFill>
-                  <a:srgbClr val="000000"/>
-                </a:solidFill>
-              </a:defRPr>
-            </a:pPr>
-            <a:r>
-              <a:rPr dirty="0"/>
-              <a:t>Employee</a:t>
-            </a:r>
-          </a:p>
-        </p:txBody>
-      </p:sp>
-      <p:sp>
-        <p:nvSpPr>
-          <p:cNvPr id="9" name="Rectangle 8"/>
-          <p:cNvSpPr/>
-          <p:nvPr/>
-        </p:nvSpPr>
-        <p:spPr>
-          <a:xfrm>
-            <a:off x="2286000" y="3401290"/>
-            <a:ext cx="914400" cy="914400"/>
-          </a:xfrm>
-          <a:prstGeom prst="rect">
-            <a:avLst/>
-          </a:prstGeom>
-          <a:solidFill>
-            <a:schemeClr val="bg1"/>
-          </a:solidFill>
-          <a:ln>
-            <a:solidFill>
-              <a:srgbClr val="505050"/>
-            </a:solidFill>
-          </a:ln>
-        </p:spPr>
-        <p:style>
-          <a:lnRef idx="1">
-            <a:schemeClr val="accent1"/>
-          </a:lnRef>
-          <a:fillRef idx="3">
-            <a:schemeClr val="accent1"/>
-          </a:fillRef>
-          <a:effectRef idx="2">
-            <a:schemeClr val="accent1"/>
-          </a:effectRef>
-          <a:fontRef idx="minor">
-            <a:schemeClr val="lt1"/>
-          </a:fontRef>
-        </p:style>
-        <p:txBody>
-          <a:bodyPr rtlCol="0" anchor="ctr"/>
-          <a:lstStyle/>
-          <a:p>
-            <a:pPr>
-              <a:defRPr sz="1008">
-                <a:solidFill>
-                  <a:srgbClr val="000000"/>
-                </a:solidFill>
-              </a:defRPr>
-            </a:pPr>
-            <a:r>
-              <a:rPr dirty="0" err="1"/>
-              <a:t>Studen</a:t>
-            </a:r>
-            <a:r>
-              <a:rPr lang="da-DK" dirty="0"/>
-              <a:t>t</a:t>
-            </a:r>
-            <a:endParaRPr dirty="0"/>
-          </a:p>
-        </p:txBody>
-      </p:sp>
-      <p:sp>
-        <p:nvSpPr>
-          <p:cNvPr id="10" name="Rounded Rectangle 9"/>
-          <p:cNvSpPr/>
-          <p:nvPr/>
-        </p:nvSpPr>
-        <p:spPr>
-          <a:xfrm>
-            <a:off x="4480560" y="1378725"/>
-            <a:ext cx="2194560" cy="3200400"/>
-          </a:xfrm>
-          <a:prstGeom prst="roundRect">
-            <a:avLst/>
-          </a:prstGeom>
-          <a:solidFill>
-            <a:schemeClr val="bg1">
-              <a:lumMod val="85000"/>
-            </a:schemeClr>
-          </a:solidFill>
-          <a:ln>
-            <a:solidFill>
-              <a:srgbClr val="505050"/>
-            </a:solidFill>
-          </a:ln>
-        </p:spPr>
-        <p:style>
-          <a:lnRef idx="1">
-            <a:schemeClr val="accent1"/>
-          </a:lnRef>
-          <a:fillRef idx="3">
-            <a:schemeClr val="accent1"/>
-          </a:fillRef>
-          <a:effectRef idx="2">
-            <a:schemeClr val="accent1"/>
-          </a:effectRef>
-          <a:fontRef idx="minor">
-            <a:schemeClr val="lt1"/>
-          </a:fontRef>
-        </p:style>
-        <p:txBody>
-          <a:bodyPr rtlCol="0" anchor="ctr"/>
-          <a:lstStyle/>
-          <a:p>
-            <a:r>
-              <a:t>Services</a:t>
-            </a:r>
-          </a:p>
-        </p:txBody>
-      </p:sp>
-      <p:sp>
-        <p:nvSpPr>
-          <p:cNvPr id="11" name="Rectangle 10"/>
-          <p:cNvSpPr/>
-          <p:nvPr/>
-        </p:nvSpPr>
-        <p:spPr>
-          <a:xfrm>
-            <a:off x="4663440" y="2110245"/>
-            <a:ext cx="1828800" cy="731520"/>
-          </a:xfrm>
-          <a:prstGeom prst="rect">
-            <a:avLst/>
-          </a:prstGeom>
-          <a:solidFill>
-            <a:schemeClr val="bg1"/>
-          </a:solidFill>
-          <a:ln>
-            <a:solidFill>
-              <a:srgbClr val="505050"/>
-            </a:solidFill>
-          </a:ln>
-        </p:spPr>
-        <p:style>
-          <a:lnRef idx="1">
-            <a:schemeClr val="accent1"/>
-          </a:lnRef>
-          <a:fillRef idx="3">
-            <a:schemeClr val="accent1"/>
-          </a:fillRef>
-          <a:effectRef idx="2">
-            <a:schemeClr val="accent1"/>
-          </a:effectRef>
-          <a:fontRef idx="minor">
-            <a:schemeClr val="lt1"/>
-          </a:fontRef>
-        </p:style>
-        <p:txBody>
-          <a:bodyPr rtlCol="0" anchor="ctr"/>
-          <a:lstStyle/>
-          <a:p>
-            <a:pPr>
-              <a:defRPr sz="1008">
-                <a:solidFill>
-                  <a:srgbClr val="000000"/>
-                </a:solidFill>
-              </a:defRPr>
-            </a:pPr>
-            <a:r>
-              <a:t>Employee Service</a:t>
-            </a:r>
-          </a:p>
-        </p:txBody>
-      </p:sp>
-      <p:sp>
-        <p:nvSpPr>
-          <p:cNvPr id="12" name="Rectangle 11"/>
-          <p:cNvSpPr/>
-          <p:nvPr/>
-        </p:nvSpPr>
-        <p:spPr>
-          <a:xfrm>
-            <a:off x="4663440" y="3481845"/>
-            <a:ext cx="1828800" cy="731520"/>
-          </a:xfrm>
-          <a:prstGeom prst="rect">
-            <a:avLst/>
-          </a:prstGeom>
-          <a:solidFill>
-            <a:schemeClr val="bg1"/>
-          </a:solidFill>
-          <a:ln>
-            <a:solidFill>
-              <a:srgbClr val="505050"/>
-            </a:solidFill>
-          </a:ln>
-        </p:spPr>
-        <p:style>
-          <a:lnRef idx="1">
-            <a:schemeClr val="accent1"/>
-          </a:lnRef>
-          <a:fillRef idx="3">
-            <a:schemeClr val="accent1"/>
-          </a:fillRef>
-          <a:effectRef idx="2">
-            <a:schemeClr val="accent1"/>
-          </a:effectRef>
-          <a:fontRef idx="minor">
-            <a:schemeClr val="lt1"/>
-          </a:fontRef>
-        </p:style>
-        <p:txBody>
-          <a:bodyPr rtlCol="0" anchor="ctr"/>
-          <a:lstStyle/>
-          <a:p>
-            <a:pPr>
-              <a:defRPr sz="1008">
-                <a:solidFill>
-                  <a:srgbClr val="000000"/>
-                </a:solidFill>
-              </a:defRPr>
-            </a:pPr>
-            <a:r>
-              <a:t>Student Service</a:t>
-            </a:r>
-          </a:p>
-        </p:txBody>
-      </p:sp>
-      <p:sp>
-        <p:nvSpPr>
-          <p:cNvPr id="13" name="Rectangle 12"/>
-          <p:cNvSpPr/>
-          <p:nvPr/>
-        </p:nvSpPr>
-        <p:spPr>
-          <a:xfrm>
-            <a:off x="6949440" y="2110245"/>
-            <a:ext cx="1828800" cy="731520"/>
-          </a:xfrm>
-          <a:prstGeom prst="rect">
-            <a:avLst/>
-          </a:prstGeom>
-          <a:solidFill>
-            <a:srgbClr val="FFFFFF"/>
-          </a:solidFill>
-          <a:ln>
-            <a:solidFill>
-              <a:srgbClr val="505050"/>
-            </a:solidFill>
-          </a:ln>
-        </p:spPr>
-        <p:style>
-          <a:lnRef idx="1">
-            <a:schemeClr val="accent1"/>
-          </a:lnRef>
-          <a:fillRef idx="3">
-            <a:schemeClr val="accent1"/>
-          </a:fillRef>
-          <a:effectRef idx="2">
-            <a:schemeClr val="accent1"/>
-          </a:effectRef>
-          <a:fontRef idx="minor">
-            <a:schemeClr val="lt1"/>
-          </a:fontRef>
-        </p:style>
-        <p:txBody>
-          <a:bodyPr rtlCol="0" anchor="ctr"/>
-          <a:lstStyle/>
-          <a:p>
-            <a:pPr>
-              <a:defRPr sz="1008">
-                <a:solidFill>
-                  <a:srgbClr val="000000"/>
-                </a:solidFill>
-              </a:defRPr>
-            </a:pPr>
-            <a:r>
-              <a:t>SIS</a:t>
-            </a:r>
-          </a:p>
-        </p:txBody>
-      </p:sp>
-      <p:sp>
-        <p:nvSpPr>
-          <p:cNvPr id="14" name="Rectangle 13"/>
-          <p:cNvSpPr/>
-          <p:nvPr/>
-        </p:nvSpPr>
-        <p:spPr>
-          <a:xfrm>
-            <a:off x="6949440" y="3481845"/>
-            <a:ext cx="1828800" cy="731520"/>
-          </a:xfrm>
-          <a:prstGeom prst="rect">
-            <a:avLst/>
-          </a:prstGeom>
-          <a:solidFill>
-            <a:srgbClr val="FFFFFF"/>
-          </a:solidFill>
-          <a:ln>
-            <a:solidFill>
-              <a:srgbClr val="505050"/>
-            </a:solidFill>
-          </a:ln>
-        </p:spPr>
-        <p:style>
-          <a:lnRef idx="1">
-            <a:schemeClr val="accent1"/>
-          </a:lnRef>
-          <a:fillRef idx="3">
-            <a:schemeClr val="accent1"/>
-          </a:fillRef>
-          <a:effectRef idx="2">
-            <a:schemeClr val="accent1"/>
-          </a:effectRef>
-          <a:fontRef idx="minor">
-            <a:schemeClr val="lt1"/>
-          </a:fontRef>
-        </p:style>
-        <p:txBody>
-          <a:bodyPr rtlCol="0" anchor="ctr"/>
-          <a:lstStyle/>
-          <a:p>
-            <a:pPr>
-              <a:defRPr sz="1008">
-                <a:solidFill>
-                  <a:srgbClr val="000000"/>
-                </a:solidFill>
-              </a:defRPr>
-            </a:pPr>
-            <a:r>
-              <a:t>Application XXX</a:t>
-            </a:r>
-          </a:p>
-        </p:txBody>
-      </p:sp>
+      </p:pic>
     </p:spTree>
+    <p:extLst>
+      <p:ext uri="{BB962C8B-B14F-4D97-AF65-F5344CB8AC3E}">
+        <p14:creationId xmlns:p14="http://schemas.microsoft.com/office/powerpoint/2010/main" val="50468910"/>
+      </p:ext>
+    </p:extLst>
   </p:cSld>
   <p:clrMapOvr>
     <a:masterClrMapping/>
@@ -4225,326 +3370,6 @@
 </file>
 
 <file path=ppt/theme/theme1.xml><?xml version="1.0" encoding="utf-8"?>
-<a:theme xmlns:a="http://schemas.openxmlformats.org/drawingml/2006/main" name="Office Theme">
-  <a:themeElements>
-    <a:clrScheme name="Office">
-      <a:dk1>
-        <a:sysClr val="windowText" lastClr="000000"/>
-      </a:dk1>
-      <a:lt1>
-        <a:sysClr val="window" lastClr="FFFFFF"/>
-      </a:lt1>
-      <a:dk2>
-        <a:srgbClr val="1F497D"/>
-      </a:dk2>
-      <a:lt2>
-        <a:srgbClr val="EEECE1"/>
-      </a:lt2>
-      <a:accent1>
-        <a:srgbClr val="4F81BD"/>
-      </a:accent1>
-      <a:accent2>
-        <a:srgbClr val="C0504D"/>
-      </a:accent2>
-      <a:accent3>
-        <a:srgbClr val="9BBB59"/>
-      </a:accent3>
-      <a:accent4>
-        <a:srgbClr val="8064A2"/>
-      </a:accent4>
-      <a:accent5>
-        <a:srgbClr val="4BACC6"/>
-      </a:accent5>
-      <a:accent6>
-        <a:srgbClr val="F79646"/>
-      </a:accent6>
-      <a:hlink>
-        <a:srgbClr val="0000FF"/>
-      </a:hlink>
-      <a:folHlink>
-        <a:srgbClr val="800080"/>
-      </a:folHlink>
-    </a:clrScheme>
-    <a:fontScheme name="Office">
-      <a:majorFont>
-        <a:latin typeface="Calibri"/>
-        <a:ea typeface=""/>
-        <a:cs typeface=""/>
-        <a:font script="Jpan" typeface="ＭＳ Ｐゴシック"/>
-        <a:font script="Hang" typeface="맑은 고딕"/>
-        <a:font script="Hans" typeface="宋体"/>
-        <a:font script="Hant" typeface="新細明體"/>
-        <a:font script="Arab" typeface="Times New Roman"/>
-        <a:font script="Hebr" typeface="Times New Roman"/>
-        <a:font script="Thai" typeface="Angsana New"/>
-        <a:font script="Ethi" typeface="Nyala"/>
-        <a:font script="Beng" typeface="Vrinda"/>
-        <a:font script="Gujr" typeface="Shruti"/>
-        <a:font script="Khmr" typeface="MoolBoran"/>
-        <a:font script="Knda" typeface="Tunga"/>
-        <a:font script="Guru" typeface="Raavi"/>
-        <a:font script="Cans" typeface="Euphemia"/>
-        <a:font script="Cher" typeface="Plantagenet Cherokee"/>
-        <a:font script="Yiii" typeface="Microsoft Yi Baiti"/>
-        <a:font script="Tibt" typeface="Microsoft Himalaya"/>
-        <a:font script="Thaa" typeface="MV Boli"/>
-        <a:font script="Deva" typeface="Mangal"/>
-        <a:font script="Telu" typeface="Gautami"/>
-        <a:font script="Taml" typeface="Latha"/>
-        <a:font script="Syrc" typeface="Estrangelo Edessa"/>
-        <a:font script="Orya" typeface="Kalinga"/>
-        <a:font script="Mlym" typeface="Kartika"/>
-        <a:font script="Laoo" typeface="DokChampa"/>
-        <a:font script="Sinh" typeface="Iskoola Pota"/>
-        <a:font script="Mong" typeface="Mongolian Baiti"/>
-        <a:font script="Viet" typeface="Times New Roman"/>
-        <a:font script="Uigh" typeface="Microsoft Uighur"/>
-        <a:font script="Geor" typeface="Sylfaen"/>
-      </a:majorFont>
-      <a:minorFont>
-        <a:latin typeface="Calibri"/>
-        <a:ea typeface=""/>
-        <a:cs typeface=""/>
-        <a:font script="Jpan" typeface="ＭＳ Ｐゴシック"/>
-        <a:font script="Hang" typeface="맑은 고딕"/>
-        <a:font script="Hans" typeface="宋体"/>
-        <a:font script="Hant" typeface="新細明體"/>
-        <a:font script="Arab" typeface="Arial"/>
-        <a:font script="Hebr" typeface="Arial"/>
-        <a:font script="Thai" typeface="Cordia New"/>
-        <a:font script="Ethi" typeface="Nyala"/>
-        <a:font script="Beng" typeface="Vrinda"/>
-        <a:font script="Gujr" typeface="Shruti"/>
-        <a:font script="Khmr" typeface="DaunPenh"/>
-        <a:font script="Knda" typeface="Tunga"/>
-        <a:font script="Guru" typeface="Raavi"/>
-        <a:font script="Cans" typeface="Euphemia"/>
-        <a:font script="Cher" typeface="Plantagenet Cherokee"/>
-        <a:font script="Yiii" typeface="Microsoft Yi Baiti"/>
-        <a:font script="Tibt" typeface="Microsoft Himalaya"/>
-        <a:font script="Thaa" typeface="MV Boli"/>
-        <a:font script="Deva" typeface="Mangal"/>
-        <a:font script="Telu" typeface="Gautami"/>
-        <a:font script="Taml" typeface="Latha"/>
-        <a:font script="Syrc" typeface="Estrangelo Edessa"/>
-        <a:font script="Orya" typeface="Kalinga"/>
-        <a:font script="Mlym" typeface="Kartika"/>
-        <a:font script="Laoo" typeface="DokChampa"/>
-        <a:font script="Sinh" typeface="Iskoola Pota"/>
-        <a:font script="Mong" typeface="Mongolian Baiti"/>
-        <a:font script="Viet" typeface="Arial"/>
-        <a:font script="Uigh" typeface="Microsoft Uighur"/>
-        <a:font script="Geor" typeface="Sylfaen"/>
-      </a:minorFont>
-    </a:fontScheme>
-    <a:fmtScheme name="Office">
-      <a:fillStyleLst>
-        <a:solidFill>
-          <a:schemeClr val="phClr"/>
-        </a:solidFill>
-        <a:gradFill rotWithShape="1">
-          <a:gsLst>
-            <a:gs pos="0">
-              <a:schemeClr val="phClr">
-                <a:tint val="50000"/>
-                <a:satMod val="300000"/>
-              </a:schemeClr>
-            </a:gs>
-            <a:gs pos="35000">
-              <a:schemeClr val="phClr">
-                <a:tint val="37000"/>
-                <a:satMod val="300000"/>
-              </a:schemeClr>
-            </a:gs>
-            <a:gs pos="100000">
-              <a:schemeClr val="phClr">
-                <a:tint val="15000"/>
-                <a:satMod val="350000"/>
-              </a:schemeClr>
-            </a:gs>
-          </a:gsLst>
-          <a:lin ang="16200000" scaled="1"/>
-        </a:gradFill>
-        <a:gradFill rotWithShape="1">
-          <a:gsLst>
-            <a:gs pos="0">
-              <a:schemeClr val="phClr">
-                <a:tint val="100000"/>
-                <a:shade val="100000"/>
-                <a:satMod val="130000"/>
-              </a:schemeClr>
-            </a:gs>
-            <a:gs pos="100000">
-              <a:schemeClr val="phClr">
-                <a:tint val="50000"/>
-                <a:shade val="100000"/>
-                <a:satMod val="350000"/>
-              </a:schemeClr>
-            </a:gs>
-          </a:gsLst>
-          <a:lin ang="16200000" scaled="0"/>
-        </a:gradFill>
-      </a:fillStyleLst>
-      <a:lnStyleLst>
-        <a:ln w="9525" cap="flat" cmpd="sng" algn="ctr">
-          <a:solidFill>
-            <a:schemeClr val="phClr">
-              <a:shade val="95000"/>
-              <a:satMod val="105000"/>
-            </a:schemeClr>
-          </a:solidFill>
-          <a:prstDash val="solid"/>
-        </a:ln>
-        <a:ln w="25400" cap="flat" cmpd="sng" algn="ctr">
-          <a:solidFill>
-            <a:schemeClr val="phClr"/>
-          </a:solidFill>
-          <a:prstDash val="solid"/>
-        </a:ln>
-        <a:ln w="38100" cap="flat" cmpd="sng" algn="ctr">
-          <a:solidFill>
-            <a:schemeClr val="phClr"/>
-          </a:solidFill>
-          <a:prstDash val="solid"/>
-        </a:ln>
-      </a:lnStyleLst>
-      <a:effectStyleLst>
-        <a:effectStyle>
-          <a:effectLst>
-            <a:outerShdw blurRad="40000" dist="20000" dir="5400000" rotWithShape="0">
-              <a:srgbClr val="000000">
-                <a:alpha val="38000"/>
-              </a:srgbClr>
-            </a:outerShdw>
-          </a:effectLst>
-        </a:effectStyle>
-        <a:effectStyle>
-          <a:effectLst>
-            <a:outerShdw blurRad="40000" dist="23000" dir="5400000" rotWithShape="0">
-              <a:srgbClr val="000000">
-                <a:alpha val="35000"/>
-              </a:srgbClr>
-            </a:outerShdw>
-          </a:effectLst>
-        </a:effectStyle>
-        <a:effectStyle>
-          <a:effectLst>
-            <a:outerShdw blurRad="40000" dist="23000" dir="5400000" rotWithShape="0">
-              <a:srgbClr val="000000">
-                <a:alpha val="35000"/>
-              </a:srgbClr>
-            </a:outerShdw>
-          </a:effectLst>
-          <a:scene3d>
-            <a:camera prst="orthographicFront">
-              <a:rot lat="0" lon="0" rev="0"/>
-            </a:camera>
-            <a:lightRig rig="threePt" dir="t">
-              <a:rot lat="0" lon="0" rev="1200000"/>
-            </a:lightRig>
-          </a:scene3d>
-          <a:sp3d>
-            <a:bevelT w="63500" h="25400"/>
-          </a:sp3d>
-        </a:effectStyle>
-      </a:effectStyleLst>
-      <a:bgFillStyleLst>
-        <a:solidFill>
-          <a:schemeClr val="phClr"/>
-        </a:solidFill>
-        <a:gradFill rotWithShape="1">
-          <a:gsLst>
-            <a:gs pos="0">
-              <a:schemeClr val="phClr">
-                <a:tint val="40000"/>
-                <a:satMod val="350000"/>
-              </a:schemeClr>
-            </a:gs>
-            <a:gs pos="40000">
-              <a:schemeClr val="phClr">
-                <a:tint val="45000"/>
-                <a:shade val="99000"/>
-                <a:satMod val="350000"/>
-              </a:schemeClr>
-            </a:gs>
-            <a:gs pos="100000">
-              <a:schemeClr val="phClr">
-                <a:shade val="20000"/>
-                <a:satMod val="255000"/>
-              </a:schemeClr>
-            </a:gs>
-          </a:gsLst>
-          <a:path path="circle">
-            <a:fillToRect l="50000" t="-80000" r="50000" b="180000"/>
-          </a:path>
-        </a:gradFill>
-        <a:gradFill rotWithShape="1">
-          <a:gsLst>
-            <a:gs pos="0">
-              <a:schemeClr val="phClr">
-                <a:tint val="80000"/>
-                <a:satMod val="300000"/>
-              </a:schemeClr>
-            </a:gs>
-            <a:gs pos="100000">
-              <a:schemeClr val="phClr">
-                <a:shade val="30000"/>
-                <a:satMod val="200000"/>
-              </a:schemeClr>
-            </a:gs>
-          </a:gsLst>
-          <a:path path="circle">
-            <a:fillToRect l="50000" t="50000" r="50000" b="50000"/>
-          </a:path>
-        </a:gradFill>
-      </a:bgFillStyleLst>
-    </a:fmtScheme>
-  </a:themeElements>
-  <a:objectDefaults>
-    <a:spDef>
-      <a:spPr/>
-      <a:bodyPr/>
-      <a:lstStyle/>
-      <a:style>
-        <a:lnRef idx="1">
-          <a:schemeClr val="accent1"/>
-        </a:lnRef>
-        <a:fillRef idx="3">
-          <a:schemeClr val="accent1"/>
-        </a:fillRef>
-        <a:effectRef idx="2">
-          <a:schemeClr val="accent1"/>
-        </a:effectRef>
-        <a:fontRef idx="minor">
-          <a:schemeClr val="lt1"/>
-        </a:fontRef>
-      </a:style>
-    </a:spDef>
-    <a:lnDef>
-      <a:spPr/>
-      <a:bodyPr/>
-      <a:lstStyle/>
-      <a:style>
-        <a:lnRef idx="2">
-          <a:schemeClr val="accent1"/>
-        </a:lnRef>
-        <a:fillRef idx="0">
-          <a:schemeClr val="accent1"/>
-        </a:fillRef>
-        <a:effectRef idx="1">
-          <a:schemeClr val="accent1"/>
-        </a:effectRef>
-        <a:fontRef idx="minor">
-          <a:schemeClr val="tx1"/>
-        </a:fontRef>
-      </a:style>
-    </a:lnDef>
-  </a:objectDefaults>
-  <a:extraClrSchemeLst/>
-</a:theme>
-</file>
-
-<file path=ppt/theme/theme2.xml><?xml version="1.0" encoding="utf-8"?>
 <a:theme xmlns:a="http://schemas.openxmlformats.org/drawingml/2006/main" name="Office Theme">
   <a:themeElements>
     <a:clrScheme name="Office">
